--- a/undergrad/slides/moduletwo.pptx
+++ b/undergrad/slides/moduletwo.pptx
@@ -3682,9 +3682,41 @@
         <p:nvPr/>
       </p:nvGrpSpPr>
       <p:grpSpPr/>
+      <p:sp>
+        <p:nvSpPr>
+          <p:cNvPr id="2" name="Title 1"/>
+          <p:cNvSpPr>
+            <a:spLocks noGrp="1"/>
+          </p:cNvSpPr>
+          <p:nvPr>
+            <p:ph type="title"/>
+          </p:nvPr>
+        </p:nvSpPr>
+        <p:spPr>
+          <a:xfrm>
+            <a:off x="-12191695" y="0"/>
+            <a:ext cx="12191695" cy="914400"/>
+          </a:xfrm>
+        </p:spPr>
+        <p:txBody>
+          <a:bodyPr/>
+          <a:lstStyle/>
+          <a:p>
+            <a:r>
+              <a:t>Module Two: Generating Text, Checking Sources</a:t>
+            </a:r>
+          </a:p>
+        </p:txBody>
+      </p:sp>
       <p:grpSp>
         <p:nvGrpSpPr>
-          <p:cNvPr id="2" name="Group 1"/>
+          <p:cNvPr id="3" name="Window ENG3861.EXE">
+            <a:extLst>
+              <a:ext uri="{C183D7F6-B498-43B3-948B-1728B52AA6E4}">
+                <adec:decorative xmlns:adec="http://schemas.microsoft.com/office/drawing/2017/decorative" val="1"/>
+              </a:ext>
+            </a:extLst>
+          </p:cNvPr>
           <p:cNvGrpSpPr/>
           <p:nvPr/>
         </p:nvGrpSpPr>
@@ -3698,7 +3730,7 @@
         </p:grpSpPr>
         <p:sp>
           <p:nvSpPr>
-            <p:cNvPr id="3" name="Rectangle 2"/>
+            <p:cNvPr id="4" name="Rectangle 3"/>
             <p:cNvSpPr/>
             <p:nvPr/>
           </p:nvSpPr>
@@ -3742,7 +3774,7 @@
         </p:sp>
         <p:sp>
           <p:nvSpPr>
-            <p:cNvPr id="4" name="Rectangle 3"/>
+            <p:cNvPr id="5" name="Rectangle 4"/>
             <p:cNvSpPr/>
             <p:nvPr/>
           </p:nvSpPr>
@@ -3788,7 +3820,7 @@
         </p:sp>
         <p:sp>
           <p:nvSpPr>
-            <p:cNvPr id="5" name="Rectangle 4"/>
+            <p:cNvPr id="6" name="Rectangle 5"/>
             <p:cNvSpPr/>
             <p:nvPr/>
           </p:nvSpPr>
@@ -3834,7 +3866,7 @@
         </p:sp>
         <p:sp>
           <p:nvSpPr>
-            <p:cNvPr id="6" name="Rectangle 5"/>
+            <p:cNvPr id="7" name="Rectangle 6"/>
             <p:cNvSpPr/>
             <p:nvPr/>
           </p:nvSpPr>
@@ -3880,7 +3912,7 @@
         </p:sp>
         <p:sp>
           <p:nvSpPr>
-            <p:cNvPr id="7" name="Rectangle 6"/>
+            <p:cNvPr id="8" name="Rectangle 7"/>
             <p:cNvSpPr/>
             <p:nvPr/>
           </p:nvSpPr>
@@ -3926,7 +3958,7 @@
         </p:sp>
         <p:sp>
           <p:nvSpPr>
-            <p:cNvPr id="8" name="Rectangle 7"/>
+            <p:cNvPr id="9" name="Rectangle 8"/>
             <p:cNvSpPr/>
             <p:nvPr/>
           </p:nvSpPr>
@@ -3972,7 +4004,7 @@
         </p:sp>
         <p:sp>
           <p:nvSpPr>
-            <p:cNvPr id="9" name="TextBox 8"/>
+            <p:cNvPr id="10" name="TextBox 9"/>
             <p:cNvSpPr txBox="1"/>
             <p:nvPr/>
           </p:nvSpPr>
@@ -4005,16 +4037,134 @@
           </p:txBody>
         </p:sp>
       </p:grpSp>
+      <p:grpSp>
+        <p:nvGrpSpPr>
+          <p:cNvPr id="11" name="Unit WORDS"/>
+          <p:cNvGrpSpPr/>
+          <p:nvPr/>
+        </p:nvGrpSpPr>
+        <p:grpSpPr>
+          <a:xfrm>
+            <a:off x="1371600" y="2127758"/>
+            <a:ext cx="1542978" cy="512064"/>
+            <a:chOff x="1371600" y="2127758"/>
+            <a:chExt cx="1542978" cy="512064"/>
+          </a:xfrm>
+        </p:grpSpPr>
+        <p:sp>
+          <p:nvSpPr>
+            <p:cNvPr id="12" name="Rounded Rectangle 11"/>
+            <p:cNvSpPr/>
+            <p:nvPr/>
+          </p:nvSpPr>
+          <p:spPr>
+            <a:xfrm>
+              <a:off x="1426464" y="2182622"/>
+              <a:ext cx="1488114" cy="457200"/>
+            </a:xfrm>
+            <a:prstGeom prst="roundRect">
+              <a:avLst>
+                <a:gd name="adj" fmla="val 50000"/>
+              </a:avLst>
+            </a:prstGeom>
+            <a:solidFill>
+              <a:srgbClr val="1B1035"/>
+            </a:solidFill>
+            <a:ln>
+              <a:noFill/>
+            </a:ln>
+            <a:effectLst/>
+          </p:spPr>
+          <p:style>
+            <a:lnRef idx="1">
+              <a:schemeClr val="accent1"/>
+            </a:lnRef>
+            <a:fillRef idx="3">
+              <a:schemeClr val="accent1"/>
+            </a:fillRef>
+            <a:effectRef idx="2">
+              <a:schemeClr val="accent1"/>
+            </a:effectRef>
+            <a:fontRef idx="minor">
+              <a:schemeClr val="lt1"/>
+            </a:fontRef>
+          </p:style>
+          <p:txBody>
+            <a:bodyPr rtlCol="0" anchor="ctr"/>
+            <a:lstStyle/>
+            <a:p>
+              <a:pPr algn="ctr"/>
+            </a:p>
+          </p:txBody>
+        </p:sp>
+        <p:sp>
+          <p:nvSpPr>
+            <p:cNvPr id="13" name="Rounded Rectangle 12"/>
+            <p:cNvSpPr/>
+            <p:nvPr/>
+          </p:nvSpPr>
+          <p:spPr>
+            <a:xfrm>
+              <a:off x="1371600" y="2127758"/>
+              <a:ext cx="1488114" cy="457200"/>
+            </a:xfrm>
+            <a:prstGeom prst="roundRect">
+              <a:avLst>
+                <a:gd name="adj" fmla="val 50000"/>
+              </a:avLst>
+            </a:prstGeom>
+            <a:solidFill>
+              <a:srgbClr val="2E5BFF"/>
+            </a:solidFill>
+            <a:ln w="31750">
+              <a:solidFill>
+                <a:srgbClr val="1B1035"/>
+              </a:solidFill>
+            </a:ln>
+            <a:effectLst/>
+          </p:spPr>
+          <p:style>
+            <a:lnRef idx="1">
+              <a:schemeClr val="accent1"/>
+            </a:lnRef>
+            <a:fillRef idx="3">
+              <a:schemeClr val="accent1"/>
+            </a:fillRef>
+            <a:effectRef idx="2">
+              <a:schemeClr val="accent1"/>
+            </a:effectRef>
+            <a:fontRef idx="minor">
+              <a:schemeClr val="lt1"/>
+            </a:fontRef>
+          </p:style>
+          <p:txBody>
+            <a:bodyPr rtlCol="0" anchor="ctr" lIns="0" rIns="0" tIns="0" bIns="0" wrap="none"/>
+            <a:lstStyle/>
+            <a:p>
+              <a:pPr algn="ctr"/>
+              <a:r>
+                <a:rPr sz="1800" b="0" i="0">
+                  <a:solidFill>
+                    <a:srgbClr val="FFFFFF"/>
+                  </a:solidFill>
+                  <a:latin typeface="Arial Black"/>
+                </a:rPr>
+                <a:t>WORDS</a:t>
+              </a:r>
+            </a:p>
+          </p:txBody>
+        </p:sp>
+      </p:grpSp>
       <p:sp>
         <p:nvSpPr>
-          <p:cNvPr id="10" name="TextBox 9"/>
+          <p:cNvPr id="14" name="TextBox 13"/>
           <p:cNvSpPr txBox="1"/>
           <p:nvPr/>
         </p:nvSpPr>
         <p:spPr>
           <a:xfrm>
-            <a:off x="1280160" y="1645920"/>
-            <a:ext cx="9631375" cy="4069080"/>
+            <a:off x="1280160" y="2767838"/>
+            <a:ext cx="9631375" cy="2947162"/>
           </a:xfrm>
           <a:prstGeom prst="rect">
             <a:avLst/>
@@ -4022,21 +4172,10 @@
           <a:noFill/>
         </p:spPr>
         <p:txBody>
-          <a:bodyPr wrap="square" anchor="ctr">
+          <a:bodyPr wrap="square" anchor="t">
             <a:normAutofit/>
           </a:bodyPr>
           <a:lstStyle/>
-          <a:p>
-            <a:r>
-              <a:rPr sz="1800" b="0" i="0">
-                <a:solidFill>
-                  <a:srgbClr val="2E5BFF"/>
-                </a:solidFill>
-                <a:latin typeface="Arial Black"/>
-              </a:rPr>
-              <a:t>WORDS</a:t>
-            </a:r>
-          </a:p>
           <a:p>
             <a:r>
               <a:rPr sz="2400" b="0" i="0">
@@ -4056,7 +4195,17 @@
                 </a:solidFill>
                 <a:latin typeface="Arial Black"/>
               </a:rPr>
-              <a:t>Generating Text, Checking Sources</a:t>
+              <a:t>Generating Text,</a:t>
+            </a:r>
+            <a:br/>
+            <a:r>
+              <a:rPr sz="4800" b="0" i="0">
+                <a:solidFill>
+                  <a:srgbClr val="1B1035"/>
+                </a:solidFill>
+                <a:latin typeface="Arial Black"/>
+              </a:rPr>
+              <a:t>Checking Sources</a:t>
             </a:r>
           </a:p>
           <a:p>
@@ -4100,14 +4249,40 @@
       <p:grpSpPr/>
       <p:sp>
         <p:nvSpPr>
-          <p:cNvPr id="2" name="TextBox 1"/>
+          <p:cNvPr id="2" name="Title 1"/>
+          <p:cNvSpPr>
+            <a:spLocks noGrp="1"/>
+          </p:cNvSpPr>
+          <p:nvPr>
+            <p:ph type="title"/>
+          </p:nvPr>
+        </p:nvSpPr>
+        <p:spPr>
+          <a:xfrm>
+            <a:off x="-12191695" y="0"/>
+            <a:ext cx="12191695" cy="914400"/>
+          </a:xfrm>
+        </p:spPr>
+        <p:txBody>
+          <a:bodyPr/>
+          <a:lstStyle/>
+          <a:p>
+            <a:r>
+              <a:t>The textpocalypse</a:t>
+            </a:r>
+          </a:p>
+        </p:txBody>
+      </p:sp>
+      <p:sp>
+        <p:nvSpPr>
+          <p:cNvPr id="3" name="TextBox 2"/>
           <p:cNvSpPr txBox="1"/>
           <p:nvPr/>
         </p:nvSpPr>
         <p:spPr>
           <a:xfrm>
-            <a:off x="731520" y="1463040"/>
-            <a:ext cx="10728655" cy="2926080"/>
+            <a:off x="274320" y="1417320"/>
+            <a:ext cx="11643055" cy="4023360"/>
           </a:xfrm>
           <a:prstGeom prst="rect">
             <a:avLst/>
@@ -4132,7 +4307,11 @@
             </a:r>
           </a:p>
           <a:p>
-            <a:pPr algn="ctr"/>
+            <a:pPr algn="ctr">
+              <a:spcBef>
+                <a:spcPts val="1000"/>
+              </a:spcBef>
+            </a:pPr>
             <a:r>
               <a:rPr sz="2800" b="0" i="0">
                 <a:solidFill>
@@ -4171,9 +4350,41 @@
         <p:nvPr/>
       </p:nvGrpSpPr>
       <p:grpSpPr/>
+      <p:sp>
+        <p:nvSpPr>
+          <p:cNvPr id="2" name="Title 1"/>
+          <p:cNvSpPr>
+            <a:spLocks noGrp="1"/>
+          </p:cNvSpPr>
+          <p:nvPr>
+            <p:ph type="title"/>
+          </p:nvPr>
+        </p:nvSpPr>
+        <p:spPr>
+          <a:xfrm>
+            <a:off x="-12191695" y="0"/>
+            <a:ext cx="12191695" cy="914400"/>
+          </a:xfrm>
+        </p:spPr>
+        <p:txBody>
+          <a:bodyPr/>
+          <a:lstStyle/>
+          <a:p>
+            <a:r>
+              <a:t>The Atlantic article header 'Prepare for the Textpocalypse: Our relationship to…</a:t>
+            </a:r>
+          </a:p>
+        </p:txBody>
+      </p:sp>
       <p:grpSp>
         <p:nvGrpSpPr>
-          <p:cNvPr id="2" name="Group 1"/>
+          <p:cNvPr id="3" name="Window image.png">
+            <a:extLst>
+              <a:ext uri="{C183D7F6-B498-43B3-948B-1728B52AA6E4}">
+                <adec:decorative xmlns:adec="http://schemas.microsoft.com/office/drawing/2017/decorative" val="1"/>
+              </a:ext>
+            </a:extLst>
+          </p:cNvPr>
           <p:cNvGrpSpPr/>
           <p:nvPr/>
         </p:nvGrpSpPr>
@@ -4187,7 +4398,7 @@
         </p:grpSpPr>
         <p:sp>
           <p:nvSpPr>
-            <p:cNvPr id="3" name="Rectangle 2"/>
+            <p:cNvPr id="4" name="Rectangle 3"/>
             <p:cNvSpPr/>
             <p:nvPr/>
           </p:nvSpPr>
@@ -4231,7 +4442,7 @@
         </p:sp>
         <p:sp>
           <p:nvSpPr>
-            <p:cNvPr id="4" name="Rectangle 3"/>
+            <p:cNvPr id="5" name="Rectangle 4"/>
             <p:cNvSpPr/>
             <p:nvPr/>
           </p:nvSpPr>
@@ -4277,7 +4488,7 @@
         </p:sp>
         <p:sp>
           <p:nvSpPr>
-            <p:cNvPr id="5" name="Rectangle 4"/>
+            <p:cNvPr id="6" name="Rectangle 5"/>
             <p:cNvSpPr/>
             <p:nvPr/>
           </p:nvSpPr>
@@ -4323,7 +4534,7 @@
         </p:sp>
         <p:sp>
           <p:nvSpPr>
-            <p:cNvPr id="6" name="Rectangle 5"/>
+            <p:cNvPr id="7" name="Rectangle 6"/>
             <p:cNvSpPr/>
             <p:nvPr/>
           </p:nvSpPr>
@@ -4369,7 +4580,7 @@
         </p:sp>
         <p:sp>
           <p:nvSpPr>
-            <p:cNvPr id="7" name="Rectangle 6"/>
+            <p:cNvPr id="8" name="Rectangle 7"/>
             <p:cNvSpPr/>
             <p:nvPr/>
           </p:nvSpPr>
@@ -4415,7 +4626,7 @@
         </p:sp>
         <p:sp>
           <p:nvSpPr>
-            <p:cNvPr id="8" name="Rectangle 7"/>
+            <p:cNvPr id="9" name="Rectangle 8"/>
             <p:cNvSpPr/>
             <p:nvPr/>
           </p:nvSpPr>
@@ -4461,7 +4672,7 @@
         </p:sp>
         <p:sp>
           <p:nvSpPr>
-            <p:cNvPr id="9" name="TextBox 8"/>
+            <p:cNvPr id="10" name="TextBox 9"/>
             <p:cNvSpPr txBox="1"/>
             <p:nvPr/>
           </p:nvSpPr>
@@ -4496,7 +4707,7 @@
       </p:grpSp>
       <p:pic>
         <p:nvPicPr>
-          <p:cNvPr id="10" name="Picture 9" descr="The Atlantic article header 'Prepare for the Textpocalypse: Our relationship to writing is about to change forever; it may not end well,' by Matthew Kirschenbaum."/>
+          <p:cNvPr id="11" name="Picture 10" descr="The Atlantic article header 'Prepare for the Textpocalypse: Our relationship to writing is about to change forever; it may not end well,' by Matthew Kirschenbaum."/>
           <p:cNvPicPr>
             <a:picLocks noChangeAspect="1"/>
           </p:cNvPicPr>
@@ -4520,13 +4731,13 @@
       </p:pic>
       <p:sp>
         <p:nvSpPr>
-          <p:cNvPr id="11" name="TextBox 10"/>
+          <p:cNvPr id="12" name="TextBox 11"/>
           <p:cNvSpPr txBox="1"/>
           <p:nvPr/>
         </p:nvSpPr>
         <p:spPr>
           <a:xfrm>
-            <a:off x="822960" y="5989320"/>
+            <a:off x="822960" y="5943600"/>
             <a:ext cx="10545775" cy="731520"/>
           </a:xfrm>
           <a:prstGeom prst="rect">
@@ -4580,9 +4791,41 @@
         <p:nvPr/>
       </p:nvGrpSpPr>
       <p:grpSpPr/>
+      <p:sp>
+        <p:nvSpPr>
+          <p:cNvPr id="2" name="Title 1"/>
+          <p:cNvSpPr>
+            <a:spLocks noGrp="1"/>
+          </p:cNvSpPr>
+          <p:nvPr>
+            <p:ph type="title"/>
+          </p:nvPr>
+        </p:nvSpPr>
+        <p:spPr>
+          <a:xfrm>
+            <a:off x="-12191695" y="0"/>
+            <a:ext cx="12191695" cy="914400"/>
+          </a:xfrm>
+        </p:spPr>
+        <p:txBody>
+          <a:bodyPr/>
+          <a:lstStyle/>
+          <a:p>
+            <a:r>
+              <a:t>Quote: Matthew Kirschenbaum, 2023</a:t>
+            </a:r>
+          </a:p>
+        </p:txBody>
+      </p:sp>
       <p:grpSp>
         <p:nvGrpSpPr>
-          <p:cNvPr id="2" name="Group 1"/>
+          <p:cNvPr id="3" name="Window quote.txt">
+            <a:extLst>
+              <a:ext uri="{C183D7F6-B498-43B3-948B-1728B52AA6E4}">
+                <adec:decorative xmlns:adec="http://schemas.microsoft.com/office/drawing/2017/decorative" val="1"/>
+              </a:ext>
+            </a:extLst>
+          </p:cNvPr>
           <p:cNvGrpSpPr/>
           <p:nvPr/>
         </p:nvGrpSpPr>
@@ -4596,7 +4839,7 @@
         </p:grpSpPr>
         <p:sp>
           <p:nvSpPr>
-            <p:cNvPr id="3" name="Rectangle 2"/>
+            <p:cNvPr id="4" name="Rectangle 3"/>
             <p:cNvSpPr/>
             <p:nvPr/>
           </p:nvSpPr>
@@ -4640,7 +4883,7 @@
         </p:sp>
         <p:sp>
           <p:nvSpPr>
-            <p:cNvPr id="4" name="Rectangle 3"/>
+            <p:cNvPr id="5" name="Rectangle 4"/>
             <p:cNvSpPr/>
             <p:nvPr/>
           </p:nvSpPr>
@@ -4686,7 +4929,7 @@
         </p:sp>
         <p:sp>
           <p:nvSpPr>
-            <p:cNvPr id="5" name="Rectangle 4"/>
+            <p:cNvPr id="6" name="Rectangle 5"/>
             <p:cNvSpPr/>
             <p:nvPr/>
           </p:nvSpPr>
@@ -4732,7 +4975,7 @@
         </p:sp>
         <p:sp>
           <p:nvSpPr>
-            <p:cNvPr id="6" name="Rectangle 5"/>
+            <p:cNvPr id="7" name="Rectangle 6"/>
             <p:cNvSpPr/>
             <p:nvPr/>
           </p:nvSpPr>
@@ -4778,7 +5021,7 @@
         </p:sp>
         <p:sp>
           <p:nvSpPr>
-            <p:cNvPr id="7" name="Rectangle 6"/>
+            <p:cNvPr id="8" name="Rectangle 7"/>
             <p:cNvSpPr/>
             <p:nvPr/>
           </p:nvSpPr>
@@ -4824,7 +5067,7 @@
         </p:sp>
         <p:sp>
           <p:nvSpPr>
-            <p:cNvPr id="8" name="Rectangle 7"/>
+            <p:cNvPr id="9" name="Rectangle 8"/>
             <p:cNvSpPr/>
             <p:nvPr/>
           </p:nvSpPr>
@@ -4870,7 +5113,7 @@
         </p:sp>
         <p:sp>
           <p:nvSpPr>
-            <p:cNvPr id="9" name="TextBox 8"/>
+            <p:cNvPr id="10" name="TextBox 9"/>
             <p:cNvSpPr txBox="1"/>
             <p:nvPr/>
           </p:nvSpPr>
@@ -4905,7 +5148,7 @@
       </p:grpSp>
       <p:sp>
         <p:nvSpPr>
-          <p:cNvPr id="10" name="TextBox 9"/>
+          <p:cNvPr id="11" name="TextBox 10"/>
           <p:cNvSpPr txBox="1"/>
           <p:nvPr/>
         </p:nvSpPr>
@@ -4939,7 +5182,7 @@
       </p:sp>
       <p:sp>
         <p:nvSpPr>
-          <p:cNvPr id="11" name="TextBox 10"/>
+          <p:cNvPr id="12" name="TextBox 11"/>
           <p:cNvSpPr txBox="1"/>
           <p:nvPr/>
         </p:nvSpPr>
@@ -5008,9 +5251,41 @@
         <p:nvPr/>
       </p:nvGrpSpPr>
       <p:grpSpPr/>
+      <p:sp>
+        <p:nvSpPr>
+          <p:cNvPr id="2" name="Title 1"/>
+          <p:cNvSpPr>
+            <a:spLocks noGrp="1"/>
+          </p:cNvSpPr>
+          <p:nvPr>
+            <p:ph type="title"/>
+          </p:nvPr>
+        </p:nvSpPr>
+        <p:spPr>
+          <a:xfrm>
+            <a:off x="-12191695" y="0"/>
+            <a:ext cx="12191695" cy="914400"/>
+          </a:xfrm>
+        </p:spPr>
+        <p:txBody>
+          <a:bodyPr/>
+          <a:lstStyle/>
+          <a:p>
+            <a:r>
+              <a:t>Quote: Matthew Kirschenbaum, 2023</a:t>
+            </a:r>
+          </a:p>
+        </p:txBody>
+      </p:sp>
       <p:grpSp>
         <p:nvGrpSpPr>
-          <p:cNvPr id="2" name="Group 1"/>
+          <p:cNvPr id="3" name="Window quote.txt">
+            <a:extLst>
+              <a:ext uri="{C183D7F6-B498-43B3-948B-1728B52AA6E4}">
+                <adec:decorative xmlns:adec="http://schemas.microsoft.com/office/drawing/2017/decorative" val="1"/>
+              </a:ext>
+            </a:extLst>
+          </p:cNvPr>
           <p:cNvGrpSpPr/>
           <p:nvPr/>
         </p:nvGrpSpPr>
@@ -5024,7 +5299,7 @@
         </p:grpSpPr>
         <p:sp>
           <p:nvSpPr>
-            <p:cNvPr id="3" name="Rectangle 2"/>
+            <p:cNvPr id="4" name="Rectangle 3"/>
             <p:cNvSpPr/>
             <p:nvPr/>
           </p:nvSpPr>
@@ -5068,7 +5343,7 @@
         </p:sp>
         <p:sp>
           <p:nvSpPr>
-            <p:cNvPr id="4" name="Rectangle 3"/>
+            <p:cNvPr id="5" name="Rectangle 4"/>
             <p:cNvSpPr/>
             <p:nvPr/>
           </p:nvSpPr>
@@ -5114,7 +5389,7 @@
         </p:sp>
         <p:sp>
           <p:nvSpPr>
-            <p:cNvPr id="5" name="Rectangle 4"/>
+            <p:cNvPr id="6" name="Rectangle 5"/>
             <p:cNvSpPr/>
             <p:nvPr/>
           </p:nvSpPr>
@@ -5160,7 +5435,7 @@
         </p:sp>
         <p:sp>
           <p:nvSpPr>
-            <p:cNvPr id="6" name="Rectangle 5"/>
+            <p:cNvPr id="7" name="Rectangle 6"/>
             <p:cNvSpPr/>
             <p:nvPr/>
           </p:nvSpPr>
@@ -5206,7 +5481,7 @@
         </p:sp>
         <p:sp>
           <p:nvSpPr>
-            <p:cNvPr id="7" name="Rectangle 6"/>
+            <p:cNvPr id="8" name="Rectangle 7"/>
             <p:cNvSpPr/>
             <p:nvPr/>
           </p:nvSpPr>
@@ -5252,7 +5527,7 @@
         </p:sp>
         <p:sp>
           <p:nvSpPr>
-            <p:cNvPr id="8" name="Rectangle 7"/>
+            <p:cNvPr id="9" name="Rectangle 8"/>
             <p:cNvSpPr/>
             <p:nvPr/>
           </p:nvSpPr>
@@ -5298,7 +5573,7 @@
         </p:sp>
         <p:sp>
           <p:nvSpPr>
-            <p:cNvPr id="9" name="TextBox 8"/>
+            <p:cNvPr id="10" name="TextBox 9"/>
             <p:cNvSpPr txBox="1"/>
             <p:nvPr/>
           </p:nvSpPr>
@@ -5333,7 +5608,7 @@
       </p:grpSp>
       <p:sp>
         <p:nvSpPr>
-          <p:cNvPr id="10" name="TextBox 9"/>
+          <p:cNvPr id="11" name="TextBox 10"/>
           <p:cNvSpPr txBox="1"/>
           <p:nvPr/>
         </p:nvSpPr>
@@ -5367,7 +5642,7 @@
       </p:sp>
       <p:sp>
         <p:nvSpPr>
-          <p:cNvPr id="11" name="TextBox 10"/>
+          <p:cNvPr id="12" name="TextBox 11"/>
           <p:cNvSpPr txBox="1"/>
           <p:nvPr/>
         </p:nvSpPr>
@@ -5436,9 +5711,41 @@
         <p:nvPr/>
       </p:nvGrpSpPr>
       <p:grpSpPr/>
+      <p:sp>
+        <p:nvSpPr>
+          <p:cNvPr id="2" name="Title 1"/>
+          <p:cNvSpPr>
+            <a:spLocks noGrp="1"/>
+          </p:cNvSpPr>
+          <p:nvPr>
+            <p:ph type="title"/>
+          </p:nvPr>
+        </p:nvSpPr>
+        <p:spPr>
+          <a:xfrm>
+            <a:off x="-12191695" y="0"/>
+            <a:ext cx="12191695" cy="914400"/>
+          </a:xfrm>
+        </p:spPr>
+        <p:txBody>
+          <a:bodyPr/>
+          <a:lstStyle/>
+          <a:p>
+            <a:r>
+              <a:t>Quote: Matthew Kirschenbaum, 2023</a:t>
+            </a:r>
+          </a:p>
+        </p:txBody>
+      </p:sp>
       <p:grpSp>
         <p:nvGrpSpPr>
-          <p:cNvPr id="2" name="Group 1"/>
+          <p:cNvPr id="3" name="Window quote.txt">
+            <a:extLst>
+              <a:ext uri="{C183D7F6-B498-43B3-948B-1728B52AA6E4}">
+                <adec:decorative xmlns:adec="http://schemas.microsoft.com/office/drawing/2017/decorative" val="1"/>
+              </a:ext>
+            </a:extLst>
+          </p:cNvPr>
           <p:cNvGrpSpPr/>
           <p:nvPr/>
         </p:nvGrpSpPr>
@@ -5452,7 +5759,7 @@
         </p:grpSpPr>
         <p:sp>
           <p:nvSpPr>
-            <p:cNvPr id="3" name="Rectangle 2"/>
+            <p:cNvPr id="4" name="Rectangle 3"/>
             <p:cNvSpPr/>
             <p:nvPr/>
           </p:nvSpPr>
@@ -5496,7 +5803,7 @@
         </p:sp>
         <p:sp>
           <p:nvSpPr>
-            <p:cNvPr id="4" name="Rectangle 3"/>
+            <p:cNvPr id="5" name="Rectangle 4"/>
             <p:cNvSpPr/>
             <p:nvPr/>
           </p:nvSpPr>
@@ -5542,7 +5849,7 @@
         </p:sp>
         <p:sp>
           <p:nvSpPr>
-            <p:cNvPr id="5" name="Rectangle 4"/>
+            <p:cNvPr id="6" name="Rectangle 5"/>
             <p:cNvSpPr/>
             <p:nvPr/>
           </p:nvSpPr>
@@ -5588,7 +5895,7 @@
         </p:sp>
         <p:sp>
           <p:nvSpPr>
-            <p:cNvPr id="6" name="Rectangle 5"/>
+            <p:cNvPr id="7" name="Rectangle 6"/>
             <p:cNvSpPr/>
             <p:nvPr/>
           </p:nvSpPr>
@@ -5634,7 +5941,7 @@
         </p:sp>
         <p:sp>
           <p:nvSpPr>
-            <p:cNvPr id="7" name="Rectangle 6"/>
+            <p:cNvPr id="8" name="Rectangle 7"/>
             <p:cNvSpPr/>
             <p:nvPr/>
           </p:nvSpPr>
@@ -5680,7 +5987,7 @@
         </p:sp>
         <p:sp>
           <p:nvSpPr>
-            <p:cNvPr id="8" name="Rectangle 7"/>
+            <p:cNvPr id="9" name="Rectangle 8"/>
             <p:cNvSpPr/>
             <p:nvPr/>
           </p:nvSpPr>
@@ -5726,7 +6033,7 @@
         </p:sp>
         <p:sp>
           <p:nvSpPr>
-            <p:cNvPr id="9" name="TextBox 8"/>
+            <p:cNvPr id="10" name="TextBox 9"/>
             <p:cNvSpPr txBox="1"/>
             <p:nvPr/>
           </p:nvSpPr>
@@ -5761,7 +6068,7 @@
       </p:grpSp>
       <p:sp>
         <p:nvSpPr>
-          <p:cNvPr id="10" name="TextBox 9"/>
+          <p:cNvPr id="11" name="TextBox 10"/>
           <p:cNvSpPr txBox="1"/>
           <p:nvPr/>
         </p:nvSpPr>
@@ -5782,7 +6089,7 @@
           <a:lstStyle/>
           <a:p>
             <a:r>
-              <a:rPr sz="2200" b="0" i="0">
+              <a:rPr sz="2800" b="0" i="0">
                 <a:solidFill>
                   <a:srgbClr val="1B1035"/>
                 </a:solidFill>
@@ -5795,7 +6102,7 @@
       </p:sp>
       <p:sp>
         <p:nvSpPr>
-          <p:cNvPr id="11" name="TextBox 10"/>
+          <p:cNvPr id="12" name="TextBox 11"/>
           <p:cNvSpPr txBox="1"/>
           <p:nvPr/>
         </p:nvSpPr>
@@ -5866,14 +6173,40 @@
       <p:grpSpPr/>
       <p:sp>
         <p:nvSpPr>
-          <p:cNvPr id="2" name="TextBox 1"/>
+          <p:cNvPr id="2" name="Title 1"/>
+          <p:cNvSpPr>
+            <a:spLocks noGrp="1"/>
+          </p:cNvSpPr>
+          <p:nvPr>
+            <p:ph type="title"/>
+          </p:nvPr>
+        </p:nvSpPr>
+        <p:spPr>
+          <a:xfrm>
+            <a:off x="-12191695" y="0"/>
+            <a:ext cx="12191695" cy="914400"/>
+          </a:xfrm>
+        </p:spPr>
+        <p:txBody>
+          <a:bodyPr/>
+          <a:lstStyle/>
+          <a:p>
+            <a:r>
+              <a:t>Since then</a:t>
+            </a:r>
+          </a:p>
+        </p:txBody>
+      </p:sp>
+      <p:sp>
+        <p:nvSpPr>
+          <p:cNvPr id="3" name="TextBox 2"/>
           <p:cNvSpPr txBox="1"/>
           <p:nvPr/>
         </p:nvSpPr>
         <p:spPr>
           <a:xfrm>
-            <a:off x="731520" y="1463040"/>
-            <a:ext cx="10728655" cy="2926080"/>
+            <a:off x="274320" y="1417320"/>
+            <a:ext cx="11643055" cy="4023360"/>
           </a:xfrm>
           <a:prstGeom prst="rect">
             <a:avLst/>
@@ -5898,7 +6231,11 @@
             </a:r>
           </a:p>
           <a:p>
-            <a:pPr algn="ctr"/>
+            <a:pPr algn="ctr">
+              <a:spcBef>
+                <a:spcPts val="1000"/>
+              </a:spcBef>
+            </a:pPr>
             <a:r>
               <a:rPr sz="2800" b="0" i="0">
                 <a:solidFill>
@@ -5937,9 +6274,41 @@
         <p:nvPr/>
       </p:nvGrpSpPr>
       <p:grpSpPr/>
+      <p:sp>
+        <p:nvSpPr>
+          <p:cNvPr id="2" name="Title 1"/>
+          <p:cNvSpPr>
+            <a:spLocks noGrp="1"/>
+          </p:cNvSpPr>
+          <p:nvPr>
+            <p:ph type="title"/>
+          </p:nvPr>
+        </p:nvSpPr>
+        <p:spPr>
+          <a:xfrm>
+            <a:off x="-12191695" y="0"/>
+            <a:ext cx="12191695" cy="914400"/>
+          </a:xfrm>
+        </p:spPr>
+        <p:txBody>
+          <a:bodyPr/>
+          <a:lstStyle/>
+          <a:p>
+            <a:r>
+              <a:t>When AI-written books land in the library catalog</a:t>
+            </a:r>
+          </a:p>
+        </p:txBody>
+      </p:sp>
       <p:grpSp>
         <p:nvGrpSpPr>
-          <p:cNvPr id="2" name="Group 1"/>
+          <p:cNvPr id="3" name="Window image.png">
+            <a:extLst>
+              <a:ext uri="{C183D7F6-B498-43B3-948B-1728B52AA6E4}">
+                <adec:decorative xmlns:adec="http://schemas.microsoft.com/office/drawing/2017/decorative" val="1"/>
+              </a:ext>
+            </a:extLst>
+          </p:cNvPr>
           <p:cNvGrpSpPr/>
           <p:nvPr/>
         </p:nvGrpSpPr>
@@ -5953,7 +6322,7 @@
         </p:grpSpPr>
         <p:sp>
           <p:nvSpPr>
-            <p:cNvPr id="3" name="Rectangle 2"/>
+            <p:cNvPr id="4" name="Rectangle 3"/>
             <p:cNvSpPr/>
             <p:nvPr/>
           </p:nvSpPr>
@@ -5997,7 +6366,7 @@
         </p:sp>
         <p:sp>
           <p:nvSpPr>
-            <p:cNvPr id="4" name="Rectangle 3"/>
+            <p:cNvPr id="5" name="Rectangle 4"/>
             <p:cNvSpPr/>
             <p:nvPr/>
           </p:nvSpPr>
@@ -6043,7 +6412,7 @@
         </p:sp>
         <p:sp>
           <p:nvSpPr>
-            <p:cNvPr id="5" name="Rectangle 4"/>
+            <p:cNvPr id="6" name="Rectangle 5"/>
             <p:cNvSpPr/>
             <p:nvPr/>
           </p:nvSpPr>
@@ -6089,7 +6458,7 @@
         </p:sp>
         <p:sp>
           <p:nvSpPr>
-            <p:cNvPr id="6" name="Rectangle 5"/>
+            <p:cNvPr id="7" name="Rectangle 6"/>
             <p:cNvSpPr/>
             <p:nvPr/>
           </p:nvSpPr>
@@ -6135,7 +6504,7 @@
         </p:sp>
         <p:sp>
           <p:nvSpPr>
-            <p:cNvPr id="7" name="Rectangle 6"/>
+            <p:cNvPr id="8" name="Rectangle 7"/>
             <p:cNvSpPr/>
             <p:nvPr/>
           </p:nvSpPr>
@@ -6181,7 +6550,7 @@
         </p:sp>
         <p:sp>
           <p:nvSpPr>
-            <p:cNvPr id="8" name="Rectangle 7"/>
+            <p:cNvPr id="9" name="Rectangle 8"/>
             <p:cNvSpPr/>
             <p:nvPr/>
           </p:nvSpPr>
@@ -6227,7 +6596,7 @@
         </p:sp>
         <p:sp>
           <p:nvSpPr>
-            <p:cNvPr id="9" name="TextBox 8"/>
+            <p:cNvPr id="10" name="TextBox 9"/>
             <p:cNvSpPr txBox="1"/>
             <p:nvPr/>
           </p:nvSpPr>
@@ -6262,7 +6631,7 @@
       </p:grpSp>
       <p:pic>
         <p:nvPicPr>
-          <p:cNvPr id="10" name="Picture 9" descr="American Libraries magazine header 'Books by Bots: Librarians grapple with AI-generated material in collections,' by Reema Saleh, September 2, 2025."/>
+          <p:cNvPr id="11" name="Picture 10" descr="American Libraries magazine header 'Books by Bots: Librarians grapple with AI-generated material in collections,' by Reema Saleh, September 2, 2025."/>
           <p:cNvPicPr>
             <a:picLocks noChangeAspect="1"/>
           </p:cNvPicPr>
@@ -6286,13 +6655,13 @@
       </p:pic>
       <p:sp>
         <p:nvSpPr>
-          <p:cNvPr id="11" name="TextBox 10"/>
+          <p:cNvPr id="12" name="TextBox 11"/>
           <p:cNvSpPr txBox="1"/>
           <p:nvPr/>
         </p:nvSpPr>
         <p:spPr>
           <a:xfrm>
-            <a:off x="822960" y="5989320"/>
+            <a:off x="822960" y="5943600"/>
             <a:ext cx="10545775" cy="731520"/>
           </a:xfrm>
           <a:prstGeom prst="rect">
@@ -6345,9 +6714,41 @@
         <p:nvPr/>
       </p:nvGrpSpPr>
       <p:grpSpPr/>
+      <p:sp>
+        <p:nvSpPr>
+          <p:cNvPr id="2" name="Title 1"/>
+          <p:cNvSpPr>
+            <a:spLocks noGrp="1"/>
+          </p:cNvSpPr>
+          <p:nvPr>
+            <p:ph type="title"/>
+          </p:nvPr>
+        </p:nvSpPr>
+        <p:spPr>
+          <a:xfrm>
+            <a:off x="-12191695" y="0"/>
+            <a:ext cx="12191695" cy="914400"/>
+          </a:xfrm>
+        </p:spPr>
+        <p:txBody>
+          <a:bodyPr/>
+          <a:lstStyle/>
+          <a:p>
+            <a:r>
+              <a:t>A children's fact book suspected of being AI-generated, from the same article</a:t>
+            </a:r>
+          </a:p>
+        </p:txBody>
+      </p:sp>
       <p:grpSp>
         <p:nvGrpSpPr>
-          <p:cNvPr id="2" name="Group 1"/>
+          <p:cNvPr id="3" name="Window image.png">
+            <a:extLst>
+              <a:ext uri="{C183D7F6-B498-43B3-948B-1728B52AA6E4}">
+                <adec:decorative xmlns:adec="http://schemas.microsoft.com/office/drawing/2017/decorative" val="1"/>
+              </a:ext>
+            </a:extLst>
+          </p:cNvPr>
           <p:cNvGrpSpPr/>
           <p:nvPr/>
         </p:nvGrpSpPr>
@@ -6361,7 +6762,7 @@
         </p:grpSpPr>
         <p:sp>
           <p:nvSpPr>
-            <p:cNvPr id="3" name="Rectangle 2"/>
+            <p:cNvPr id="4" name="Rectangle 3"/>
             <p:cNvSpPr/>
             <p:nvPr/>
           </p:nvSpPr>
@@ -6405,7 +6806,7 @@
         </p:sp>
         <p:sp>
           <p:nvSpPr>
-            <p:cNvPr id="4" name="Rectangle 3"/>
+            <p:cNvPr id="5" name="Rectangle 4"/>
             <p:cNvSpPr/>
             <p:nvPr/>
           </p:nvSpPr>
@@ -6451,7 +6852,7 @@
         </p:sp>
         <p:sp>
           <p:nvSpPr>
-            <p:cNvPr id="5" name="Rectangle 4"/>
+            <p:cNvPr id="6" name="Rectangle 5"/>
             <p:cNvSpPr/>
             <p:nvPr/>
           </p:nvSpPr>
@@ -6497,7 +6898,7 @@
         </p:sp>
         <p:sp>
           <p:nvSpPr>
-            <p:cNvPr id="6" name="Rectangle 5"/>
+            <p:cNvPr id="7" name="Rectangle 6"/>
             <p:cNvSpPr/>
             <p:nvPr/>
           </p:nvSpPr>
@@ -6543,7 +6944,7 @@
         </p:sp>
         <p:sp>
           <p:nvSpPr>
-            <p:cNvPr id="7" name="Rectangle 6"/>
+            <p:cNvPr id="8" name="Rectangle 7"/>
             <p:cNvSpPr/>
             <p:nvPr/>
           </p:nvSpPr>
@@ -6589,7 +6990,7 @@
         </p:sp>
         <p:sp>
           <p:nvSpPr>
-            <p:cNvPr id="8" name="Rectangle 7"/>
+            <p:cNvPr id="9" name="Rectangle 8"/>
             <p:cNvSpPr/>
             <p:nvPr/>
           </p:nvSpPr>
@@ -6635,7 +7036,7 @@
         </p:sp>
         <p:sp>
           <p:nvSpPr>
-            <p:cNvPr id="9" name="TextBox 8"/>
+            <p:cNvPr id="10" name="TextBox 9"/>
             <p:cNvSpPr txBox="1"/>
             <p:nvPr/>
           </p:nvSpPr>
@@ -6670,7 +7071,7 @@
       </p:grpSp>
       <p:pic>
         <p:nvPicPr>
-          <p:cNvPr id="10" name="Picture 9" descr="Open children's picture book with cartoon rabbits on green hills, captioned as a title suspected to have been written by artificial intelligence."/>
+          <p:cNvPr id="11" name="Picture 10" descr="Open children's picture book with cartoon rabbits on green hills, captioned as a title suspected to have been written by artificial intelligence."/>
           <p:cNvPicPr>
             <a:picLocks noChangeAspect="1"/>
           </p:cNvPicPr>
@@ -6694,13 +7095,13 @@
       </p:pic>
       <p:sp>
         <p:nvSpPr>
-          <p:cNvPr id="11" name="TextBox 10"/>
+          <p:cNvPr id="12" name="TextBox 11"/>
           <p:cNvSpPr txBox="1"/>
           <p:nvPr/>
         </p:nvSpPr>
         <p:spPr>
           <a:xfrm>
-            <a:off x="822960" y="5989320"/>
+            <a:off x="822960" y="5943600"/>
             <a:ext cx="10545775" cy="731520"/>
           </a:xfrm>
           <a:prstGeom prst="rect">
@@ -6753,9 +7154,41 @@
         <p:nvPr/>
       </p:nvGrpSpPr>
       <p:grpSpPr/>
+      <p:sp>
+        <p:nvSpPr>
+          <p:cNvPr id="2" name="Title 1"/>
+          <p:cNvSpPr>
+            <a:spLocks noGrp="1"/>
+          </p:cNvSpPr>
+          <p:nvPr>
+            <p:ph type="title"/>
+          </p:nvPr>
+        </p:nvSpPr>
+        <p:spPr>
+          <a:xfrm>
+            <a:off x="-12191695" y="0"/>
+            <a:ext cx="12191695" cy="914400"/>
+          </a:xfrm>
+        </p:spPr>
+        <p:txBody>
+          <a:bodyPr/>
+          <a:lstStyle/>
+          <a:p>
+            <a:r>
+              <a:t>Hallucinated citations reach the courtroom</a:t>
+            </a:r>
+          </a:p>
+        </p:txBody>
+      </p:sp>
       <p:grpSp>
         <p:nvGrpSpPr>
-          <p:cNvPr id="2" name="Group 1"/>
+          <p:cNvPr id="3" name="Window image.png">
+            <a:extLst>
+              <a:ext uri="{C183D7F6-B498-43B3-948B-1728B52AA6E4}">
+                <adec:decorative xmlns:adec="http://schemas.microsoft.com/office/drawing/2017/decorative" val="1"/>
+              </a:ext>
+            </a:extLst>
+          </p:cNvPr>
           <p:cNvGrpSpPr/>
           <p:nvPr/>
         </p:nvGrpSpPr>
@@ -6769,7 +7202,7 @@
         </p:grpSpPr>
         <p:sp>
           <p:nvSpPr>
-            <p:cNvPr id="3" name="Rectangle 2"/>
+            <p:cNvPr id="4" name="Rectangle 3"/>
             <p:cNvSpPr/>
             <p:nvPr/>
           </p:nvSpPr>
@@ -6813,7 +7246,7 @@
         </p:sp>
         <p:sp>
           <p:nvSpPr>
-            <p:cNvPr id="4" name="Rectangle 3"/>
+            <p:cNvPr id="5" name="Rectangle 4"/>
             <p:cNvSpPr/>
             <p:nvPr/>
           </p:nvSpPr>
@@ -6859,7 +7292,7 @@
         </p:sp>
         <p:sp>
           <p:nvSpPr>
-            <p:cNvPr id="5" name="Rectangle 4"/>
+            <p:cNvPr id="6" name="Rectangle 5"/>
             <p:cNvSpPr/>
             <p:nvPr/>
           </p:nvSpPr>
@@ -6905,7 +7338,7 @@
         </p:sp>
         <p:sp>
           <p:nvSpPr>
-            <p:cNvPr id="6" name="Rectangle 5"/>
+            <p:cNvPr id="7" name="Rectangle 6"/>
             <p:cNvSpPr/>
             <p:nvPr/>
           </p:nvSpPr>
@@ -6951,7 +7384,7 @@
         </p:sp>
         <p:sp>
           <p:nvSpPr>
-            <p:cNvPr id="7" name="Rectangle 6"/>
+            <p:cNvPr id="8" name="Rectangle 7"/>
             <p:cNvSpPr/>
             <p:nvPr/>
           </p:nvSpPr>
@@ -6997,7 +7430,7 @@
         </p:sp>
         <p:sp>
           <p:nvSpPr>
-            <p:cNvPr id="8" name="Rectangle 7"/>
+            <p:cNvPr id="9" name="Rectangle 8"/>
             <p:cNvSpPr/>
             <p:nvPr/>
           </p:nvSpPr>
@@ -7043,7 +7476,7 @@
         </p:sp>
         <p:sp>
           <p:nvSpPr>
-            <p:cNvPr id="9" name="TextBox 8"/>
+            <p:cNvPr id="10" name="TextBox 9"/>
             <p:cNvSpPr txBox="1"/>
             <p:nvPr/>
           </p:nvSpPr>
@@ -7078,7 +7511,7 @@
       </p:grpSp>
       <p:pic>
         <p:nvPicPr>
-          <p:cNvPr id="10" name="Picture 9" descr="Law.com headline 'Judge's AI Error-Laden Ruling Faces Appellate Scrutiny. Are There Lessons for Lawyers?' with the pull quote 'The cure for AI hallucinations is human verification.'"/>
+          <p:cNvPr id="11" name="Picture 10" descr="Law.com headline 'Judge's AI Error-Laden Ruling Faces Appellate Scrutiny. Are There Lessons for Lawyers?' with the pull quote 'The cure for AI hallucinations is human verification.'"/>
           <p:cNvPicPr>
             <a:picLocks noChangeAspect="1"/>
           </p:cNvPicPr>
@@ -7102,13 +7535,13 @@
       </p:pic>
       <p:sp>
         <p:nvSpPr>
-          <p:cNvPr id="11" name="TextBox 10"/>
+          <p:cNvPr id="12" name="TextBox 11"/>
           <p:cNvSpPr txBox="1"/>
           <p:nvPr/>
         </p:nvSpPr>
         <p:spPr>
           <a:xfrm>
-            <a:off x="822960" y="5989320"/>
+            <a:off x="822960" y="5943600"/>
             <a:ext cx="10545775" cy="731520"/>
           </a:xfrm>
           <a:prstGeom prst="rect">
@@ -7171,9 +7604,41 @@
         <p:nvPr/>
       </p:nvGrpSpPr>
       <p:grpSpPr/>
+      <p:sp>
+        <p:nvSpPr>
+          <p:cNvPr id="2" name="Title 1"/>
+          <p:cNvSpPr>
+            <a:spLocks noGrp="1"/>
+          </p:cNvSpPr>
+          <p:nvPr>
+            <p:ph type="title"/>
+          </p:nvPr>
+        </p:nvSpPr>
+        <p:spPr>
+          <a:xfrm>
+            <a:off x="-12191695" y="0"/>
+            <a:ext cx="12191695" cy="914400"/>
+          </a:xfrm>
+        </p:spPr>
+        <p:txBody>
+          <a:bodyPr/>
+          <a:lstStyle/>
+          <a:p>
+            <a:r>
+              <a:t>AI search answers the question you asked, whether or not it makes sense</a:t>
+            </a:r>
+          </a:p>
+        </p:txBody>
+      </p:sp>
       <p:grpSp>
         <p:nvGrpSpPr>
-          <p:cNvPr id="2" name="Group 1"/>
+          <p:cNvPr id="3" name="Window image.png">
+            <a:extLst>
+              <a:ext uri="{C183D7F6-B498-43B3-948B-1728B52AA6E4}">
+                <adec:decorative xmlns:adec="http://schemas.microsoft.com/office/drawing/2017/decorative" val="1"/>
+              </a:ext>
+            </a:extLst>
+          </p:cNvPr>
           <p:cNvGrpSpPr/>
           <p:nvPr/>
         </p:nvGrpSpPr>
@@ -7187,7 +7652,7 @@
         </p:grpSpPr>
         <p:sp>
           <p:nvSpPr>
-            <p:cNvPr id="3" name="Rectangle 2"/>
+            <p:cNvPr id="4" name="Rectangle 3"/>
             <p:cNvSpPr/>
             <p:nvPr/>
           </p:nvSpPr>
@@ -7231,7 +7696,7 @@
         </p:sp>
         <p:sp>
           <p:nvSpPr>
-            <p:cNvPr id="4" name="Rectangle 3"/>
+            <p:cNvPr id="5" name="Rectangle 4"/>
             <p:cNvSpPr/>
             <p:nvPr/>
           </p:nvSpPr>
@@ -7277,7 +7742,7 @@
         </p:sp>
         <p:sp>
           <p:nvSpPr>
-            <p:cNvPr id="5" name="Rectangle 4"/>
+            <p:cNvPr id="6" name="Rectangle 5"/>
             <p:cNvSpPr/>
             <p:nvPr/>
           </p:nvSpPr>
@@ -7323,7 +7788,7 @@
         </p:sp>
         <p:sp>
           <p:nvSpPr>
-            <p:cNvPr id="6" name="Rectangle 5"/>
+            <p:cNvPr id="7" name="Rectangle 6"/>
             <p:cNvSpPr/>
             <p:nvPr/>
           </p:nvSpPr>
@@ -7369,7 +7834,7 @@
         </p:sp>
         <p:sp>
           <p:nvSpPr>
-            <p:cNvPr id="7" name="Rectangle 6"/>
+            <p:cNvPr id="8" name="Rectangle 7"/>
             <p:cNvSpPr/>
             <p:nvPr/>
           </p:nvSpPr>
@@ -7415,7 +7880,7 @@
         </p:sp>
         <p:sp>
           <p:nvSpPr>
-            <p:cNvPr id="8" name="Rectangle 7"/>
+            <p:cNvPr id="9" name="Rectangle 8"/>
             <p:cNvSpPr/>
             <p:nvPr/>
           </p:nvSpPr>
@@ -7461,7 +7926,7 @@
         </p:sp>
         <p:sp>
           <p:nvSpPr>
-            <p:cNvPr id="9" name="TextBox 8"/>
+            <p:cNvPr id="10" name="TextBox 9"/>
             <p:cNvSpPr txBox="1"/>
             <p:nvPr/>
           </p:nvSpPr>
@@ -7496,7 +7961,7 @@
       </p:grpSp>
       <p:pic>
         <p:nvPicPr>
-          <p:cNvPr id="10" name="Picture 9" descr="Google search for 'can a cat play in the NBA' with an AI Overview explaining that cats might not be effective NBA players, including a bullet for 'Licking the stanchion.'"/>
+          <p:cNvPr id="11" name="Picture 10" descr="Google search for 'can a cat play in the NBA' with an AI Overview explaining that cats might not be effective NBA players, including a bullet for 'Licking the stanchion.'"/>
           <p:cNvPicPr>
             <a:picLocks noChangeAspect="1"/>
           </p:cNvPicPr>
@@ -7520,13 +7985,13 @@
       </p:pic>
       <p:sp>
         <p:nvSpPr>
-          <p:cNvPr id="11" name="TextBox 10"/>
+          <p:cNvPr id="12" name="TextBox 11"/>
           <p:cNvSpPr txBox="1"/>
           <p:nvPr/>
         </p:nvSpPr>
         <p:spPr>
           <a:xfrm>
-            <a:off x="822960" y="5989320"/>
+            <a:off x="822960" y="5943600"/>
             <a:ext cx="10545775" cy="731520"/>
           </a:xfrm>
           <a:prstGeom prst="rect">
@@ -7581,7 +8046,33 @@
       <p:grpSpPr/>
       <p:sp>
         <p:nvSpPr>
-          <p:cNvPr id="2" name="TextBox 1"/>
+          <p:cNvPr id="2" name="Title 1"/>
+          <p:cNvSpPr>
+            <a:spLocks noGrp="1"/>
+          </p:cNvSpPr>
+          <p:nvPr>
+            <p:ph type="title"/>
+          </p:nvPr>
+        </p:nvSpPr>
+        <p:spPr>
+          <a:xfrm>
+            <a:off x="-12191695" y="0"/>
+            <a:ext cx="12191695" cy="914400"/>
+          </a:xfrm>
+        </p:spPr>
+        <p:txBody>
+          <a:bodyPr/>
+          <a:lstStyle/>
+          <a:p>
+            <a:r>
+              <a:t>Readings</a:t>
+            </a:r>
+          </a:p>
+        </p:txBody>
+      </p:sp>
+      <p:sp>
+        <p:nvSpPr>
+          <p:cNvPr id="3" name="TextBox 2"/>
           <p:cNvSpPr txBox="1"/>
           <p:nvPr/>
         </p:nvSpPr>
@@ -7615,7 +8106,7 @@
       </p:sp>
       <p:sp>
         <p:nvSpPr>
-          <p:cNvPr id="3" name="TextBox 2"/>
+          <p:cNvPr id="4" name="TextBox 3"/>
           <p:cNvSpPr txBox="1"/>
           <p:nvPr/>
         </p:nvSpPr>
@@ -7694,7 +8185,7 @@
                 </a:solidFill>
                 <a:latin typeface="Verdana"/>
               </a:rPr>
-              <a:t>— a metaphor for what language models keep and what they lose</a:t>
+              <a:t> — a metaphor for what language models keep and what they lose</a:t>
             </a:r>
           </a:p>
           <a:p>
@@ -7757,7 +8248,7 @@
                 </a:solidFill>
                 <a:latin typeface="Verdana"/>
               </a:rPr>
-              <a:t>— what happens when machine-written text floods the web</a:t>
+              <a:t> — what happens when machine-written text floods the web</a:t>
             </a:r>
           </a:p>
         </p:txBody>
@@ -7788,9 +8279,41 @@
         <p:nvPr/>
       </p:nvGrpSpPr>
       <p:grpSpPr/>
+      <p:sp>
+        <p:nvSpPr>
+          <p:cNvPr id="2" name="Title 1"/>
+          <p:cNvSpPr>
+            <a:spLocks noGrp="1"/>
+          </p:cNvSpPr>
+          <p:nvPr>
+            <p:ph type="title"/>
+          </p:nvPr>
+        </p:nvSpPr>
+        <p:spPr>
+          <a:xfrm>
+            <a:off x="-12191695" y="0"/>
+            <a:ext cx="12191695" cy="914400"/>
+          </a:xfrm>
+        </p:spPr>
+        <p:txBody>
+          <a:bodyPr/>
+          <a:lstStyle/>
+          <a:p>
+            <a:r>
+              <a:t>Check the source: a confident answer, compressed from the wrong context</a:t>
+            </a:r>
+          </a:p>
+        </p:txBody>
+      </p:sp>
       <p:grpSp>
         <p:nvGrpSpPr>
-          <p:cNvPr id="2" name="Group 1"/>
+          <p:cNvPr id="3" name="Window image.png">
+            <a:extLst>
+              <a:ext uri="{C183D7F6-B498-43B3-948B-1728B52AA6E4}">
+                <adec:decorative xmlns:adec="http://schemas.microsoft.com/office/drawing/2017/decorative" val="1"/>
+              </a:ext>
+            </a:extLst>
+          </p:cNvPr>
           <p:cNvGrpSpPr/>
           <p:nvPr/>
         </p:nvGrpSpPr>
@@ -7804,7 +8327,7 @@
         </p:grpSpPr>
         <p:sp>
           <p:nvSpPr>
-            <p:cNvPr id="3" name="Rectangle 2"/>
+            <p:cNvPr id="4" name="Rectangle 3"/>
             <p:cNvSpPr/>
             <p:nvPr/>
           </p:nvSpPr>
@@ -7848,7 +8371,7 @@
         </p:sp>
         <p:sp>
           <p:nvSpPr>
-            <p:cNvPr id="4" name="Rectangle 3"/>
+            <p:cNvPr id="5" name="Rectangle 4"/>
             <p:cNvSpPr/>
             <p:nvPr/>
           </p:nvSpPr>
@@ -7894,7 +8417,7 @@
         </p:sp>
         <p:sp>
           <p:nvSpPr>
-            <p:cNvPr id="5" name="Rectangle 4"/>
+            <p:cNvPr id="6" name="Rectangle 5"/>
             <p:cNvSpPr/>
             <p:nvPr/>
           </p:nvSpPr>
@@ -7940,7 +8463,7 @@
         </p:sp>
         <p:sp>
           <p:nvSpPr>
-            <p:cNvPr id="6" name="Rectangle 5"/>
+            <p:cNvPr id="7" name="Rectangle 6"/>
             <p:cNvSpPr/>
             <p:nvPr/>
           </p:nvSpPr>
@@ -7986,7 +8509,7 @@
         </p:sp>
         <p:sp>
           <p:nvSpPr>
-            <p:cNvPr id="7" name="Rectangle 6"/>
+            <p:cNvPr id="8" name="Rectangle 7"/>
             <p:cNvSpPr/>
             <p:nvPr/>
           </p:nvSpPr>
@@ -8032,7 +8555,7 @@
         </p:sp>
         <p:sp>
           <p:nvSpPr>
-            <p:cNvPr id="8" name="Rectangle 7"/>
+            <p:cNvPr id="9" name="Rectangle 8"/>
             <p:cNvSpPr/>
             <p:nvPr/>
           </p:nvSpPr>
@@ -8078,7 +8601,7 @@
         </p:sp>
         <p:sp>
           <p:nvSpPr>
-            <p:cNvPr id="9" name="TextBox 8"/>
+            <p:cNvPr id="10" name="TextBox 9"/>
             <p:cNvSpPr txBox="1"/>
             <p:nvPr/>
           </p:nvSpPr>
@@ -8113,7 +8636,7 @@
       </p:grpSp>
       <p:pic>
         <p:nvPicPr>
-          <p:cNvPr id="10" name="Picture 9" descr="Phone screenshot of a Google search for 'can i use gasoline in recipe' with an AI Overview reading 'Gasoline can be used in some cooking recipes, but it's not recommended for household cooking because it's highly flammable.'"/>
+          <p:cNvPr id="11" name="Picture 10" descr="Phone screenshot of a Google search for 'can i use gasoline in recipe' with an AI Overview reading 'Gasoline can be used in some cooking recipes, but it's not recommended for household cooking because it's highly flammable.'"/>
           <p:cNvPicPr>
             <a:picLocks noChangeAspect="1"/>
           </p:cNvPicPr>
@@ -8137,13 +8660,13 @@
       </p:pic>
       <p:sp>
         <p:nvSpPr>
-          <p:cNvPr id="11" name="TextBox 10"/>
+          <p:cNvPr id="12" name="TextBox 11"/>
           <p:cNvSpPr txBox="1"/>
           <p:nvPr/>
         </p:nvSpPr>
         <p:spPr>
           <a:xfrm>
-            <a:off x="822960" y="5989320"/>
+            <a:off x="822960" y="5943600"/>
             <a:ext cx="10545775" cy="731520"/>
           </a:xfrm>
           <a:prstGeom prst="rect">
@@ -8196,9 +8719,41 @@
         <p:nvPr/>
       </p:nvGrpSpPr>
       <p:grpSpPr/>
+      <p:sp>
+        <p:nvSpPr>
+          <p:cNvPr id="2" name="Title 1"/>
+          <p:cNvSpPr>
+            <a:spLocks noGrp="1"/>
+          </p:cNvSpPr>
+          <p:nvPr>
+            <p:ph type="title"/>
+          </p:nvPr>
+        </p:nvSpPr>
+        <p:spPr>
+          <a:xfrm>
+            <a:off x="-12191695" y="0"/>
+            <a:ext cx="12191695" cy="914400"/>
+          </a:xfrm>
+        </p:spPr>
+        <p:txBody>
+          <a:bodyPr/>
+          <a:lstStyle/>
+          <a:p>
+            <a:r>
+              <a:t>If chatbots answer everything, who keeps writing the originals?</a:t>
+            </a:r>
+          </a:p>
+        </p:txBody>
+      </p:sp>
       <p:grpSp>
         <p:nvGrpSpPr>
-          <p:cNvPr id="2" name="Group 1"/>
+          <p:cNvPr id="3" name="Window image.png">
+            <a:extLst>
+              <a:ext uri="{C183D7F6-B498-43B3-948B-1728B52AA6E4}">
+                <adec:decorative xmlns:adec="http://schemas.microsoft.com/office/drawing/2017/decorative" val="1"/>
+              </a:ext>
+            </a:extLst>
+          </p:cNvPr>
           <p:cNvGrpSpPr/>
           <p:nvPr/>
         </p:nvGrpSpPr>
@@ -8212,7 +8767,7 @@
         </p:grpSpPr>
         <p:sp>
           <p:nvSpPr>
-            <p:cNvPr id="3" name="Rectangle 2"/>
+            <p:cNvPr id="4" name="Rectangle 3"/>
             <p:cNvSpPr/>
             <p:nvPr/>
           </p:nvSpPr>
@@ -8256,7 +8811,7 @@
         </p:sp>
         <p:sp>
           <p:nvSpPr>
-            <p:cNvPr id="4" name="Rectangle 3"/>
+            <p:cNvPr id="5" name="Rectangle 4"/>
             <p:cNvSpPr/>
             <p:nvPr/>
           </p:nvSpPr>
@@ -8302,7 +8857,7 @@
         </p:sp>
         <p:sp>
           <p:nvSpPr>
-            <p:cNvPr id="5" name="Rectangle 4"/>
+            <p:cNvPr id="6" name="Rectangle 5"/>
             <p:cNvSpPr/>
             <p:nvPr/>
           </p:nvSpPr>
@@ -8348,7 +8903,7 @@
         </p:sp>
         <p:sp>
           <p:nvSpPr>
-            <p:cNvPr id="6" name="Rectangle 5"/>
+            <p:cNvPr id="7" name="Rectangle 6"/>
             <p:cNvSpPr/>
             <p:nvPr/>
           </p:nvSpPr>
@@ -8394,7 +8949,7 @@
         </p:sp>
         <p:sp>
           <p:nvSpPr>
-            <p:cNvPr id="7" name="Rectangle 6"/>
+            <p:cNvPr id="8" name="Rectangle 7"/>
             <p:cNvSpPr/>
             <p:nvPr/>
           </p:nvSpPr>
@@ -8440,7 +8995,7 @@
         </p:sp>
         <p:sp>
           <p:nvSpPr>
-            <p:cNvPr id="8" name="Rectangle 7"/>
+            <p:cNvPr id="9" name="Rectangle 8"/>
             <p:cNvSpPr/>
             <p:nvPr/>
           </p:nvSpPr>
@@ -8486,7 +9041,7 @@
         </p:sp>
         <p:sp>
           <p:nvSpPr>
-            <p:cNvPr id="9" name="TextBox 8"/>
+            <p:cNvPr id="10" name="TextBox 9"/>
             <p:cNvSpPr txBox="1"/>
             <p:nvPr/>
           </p:nvSpPr>
@@ -8521,7 +9076,7 @@
       </p:grpSp>
       <p:pic>
         <p:nvPicPr>
-          <p:cNvPr id="10" name="Picture 9" descr="The Economist article 'AI is killing the web. Can anything save it?' with a pixel-art gravestone labeled 'The World Wide Web 1989-2025.'"/>
+          <p:cNvPr id="11" name="Picture 10" descr="The Economist article 'AI is killing the web. Can anything save it?' with a pixel-art gravestone labeled 'The World Wide Web 1989-2025.'"/>
           <p:cNvPicPr>
             <a:picLocks noChangeAspect="1"/>
           </p:cNvPicPr>
@@ -8545,13 +9100,13 @@
       </p:pic>
       <p:sp>
         <p:nvSpPr>
-          <p:cNvPr id="11" name="TextBox 10"/>
+          <p:cNvPr id="12" name="TextBox 11"/>
           <p:cNvSpPr txBox="1"/>
           <p:nvPr/>
         </p:nvSpPr>
         <p:spPr>
           <a:xfrm>
-            <a:off x="822960" y="5989320"/>
+            <a:off x="822960" y="5943600"/>
             <a:ext cx="10545775" cy="731520"/>
           </a:xfrm>
           <a:prstGeom prst="rect">
@@ -8614,9 +9169,41 @@
         <p:nvPr/>
       </p:nvGrpSpPr>
       <p:grpSpPr/>
+      <p:sp>
+        <p:nvSpPr>
+          <p:cNvPr id="2" name="Title 1"/>
+          <p:cNvSpPr>
+            <a:spLocks noGrp="1"/>
+          </p:cNvSpPr>
+          <p:nvPr>
+            <p:ph type="title"/>
+          </p:nvPr>
+        </p:nvSpPr>
+        <p:spPr>
+          <a:xfrm>
+            <a:off x="-12191695" y="0"/>
+            <a:ext cx="12191695" cy="914400"/>
+          </a:xfrm>
+        </p:spPr>
+        <p:txBody>
+          <a:bodyPr/>
+          <a:lstStyle/>
+          <a:p>
+            <a:r>
+              <a:t>Quote: Ted Chiang, 2023</a:t>
+            </a:r>
+          </a:p>
+        </p:txBody>
+      </p:sp>
       <p:grpSp>
         <p:nvGrpSpPr>
-          <p:cNvPr id="2" name="Group 1"/>
+          <p:cNvPr id="3" name="Window quote.txt">
+            <a:extLst>
+              <a:ext uri="{C183D7F6-B498-43B3-948B-1728B52AA6E4}">
+                <adec:decorative xmlns:adec="http://schemas.microsoft.com/office/drawing/2017/decorative" val="1"/>
+              </a:ext>
+            </a:extLst>
+          </p:cNvPr>
           <p:cNvGrpSpPr/>
           <p:nvPr/>
         </p:nvGrpSpPr>
@@ -8630,7 +9217,7 @@
         </p:grpSpPr>
         <p:sp>
           <p:nvSpPr>
-            <p:cNvPr id="3" name="Rectangle 2"/>
+            <p:cNvPr id="4" name="Rectangle 3"/>
             <p:cNvSpPr/>
             <p:nvPr/>
           </p:nvSpPr>
@@ -8674,7 +9261,7 @@
         </p:sp>
         <p:sp>
           <p:nvSpPr>
-            <p:cNvPr id="4" name="Rectangle 3"/>
+            <p:cNvPr id="5" name="Rectangle 4"/>
             <p:cNvSpPr/>
             <p:nvPr/>
           </p:nvSpPr>
@@ -8720,7 +9307,7 @@
         </p:sp>
         <p:sp>
           <p:nvSpPr>
-            <p:cNvPr id="5" name="Rectangle 4"/>
+            <p:cNvPr id="6" name="Rectangle 5"/>
             <p:cNvSpPr/>
             <p:nvPr/>
           </p:nvSpPr>
@@ -8766,7 +9353,7 @@
         </p:sp>
         <p:sp>
           <p:nvSpPr>
-            <p:cNvPr id="6" name="Rectangle 5"/>
+            <p:cNvPr id="7" name="Rectangle 6"/>
             <p:cNvSpPr/>
             <p:nvPr/>
           </p:nvSpPr>
@@ -8812,7 +9399,7 @@
         </p:sp>
         <p:sp>
           <p:nvSpPr>
-            <p:cNvPr id="7" name="Rectangle 6"/>
+            <p:cNvPr id="8" name="Rectangle 7"/>
             <p:cNvSpPr/>
             <p:nvPr/>
           </p:nvSpPr>
@@ -8858,7 +9445,7 @@
         </p:sp>
         <p:sp>
           <p:nvSpPr>
-            <p:cNvPr id="8" name="Rectangle 7"/>
+            <p:cNvPr id="9" name="Rectangle 8"/>
             <p:cNvSpPr/>
             <p:nvPr/>
           </p:nvSpPr>
@@ -8904,7 +9491,7 @@
         </p:sp>
         <p:sp>
           <p:nvSpPr>
-            <p:cNvPr id="9" name="TextBox 8"/>
+            <p:cNvPr id="10" name="TextBox 9"/>
             <p:cNvSpPr txBox="1"/>
             <p:nvPr/>
           </p:nvSpPr>
@@ -8939,7 +9526,7 @@
       </p:grpSp>
       <p:sp>
         <p:nvSpPr>
-          <p:cNvPr id="10" name="TextBox 9"/>
+          <p:cNvPr id="11" name="TextBox 10"/>
           <p:cNvSpPr txBox="1"/>
           <p:nvPr/>
         </p:nvSpPr>
@@ -8973,7 +9560,7 @@
       </p:sp>
       <p:sp>
         <p:nvSpPr>
-          <p:cNvPr id="11" name="TextBox 10"/>
+          <p:cNvPr id="12" name="TextBox 11"/>
           <p:cNvSpPr txBox="1"/>
           <p:nvPr/>
         </p:nvSpPr>
@@ -9044,14 +9631,40 @@
       <p:grpSpPr/>
       <p:sp>
         <p:nvSpPr>
-          <p:cNvPr id="2" name="TextBox 1"/>
+          <p:cNvPr id="2" name="Title 1"/>
+          <p:cNvSpPr>
+            <a:spLocks noGrp="1"/>
+          </p:cNvSpPr>
+          <p:nvPr>
+            <p:ph type="title"/>
+          </p:nvPr>
+        </p:nvSpPr>
+        <p:spPr>
+          <a:xfrm>
+            <a:off x="-12191695" y="0"/>
+            <a:ext cx="12191695" cy="914400"/>
+          </a:xfrm>
+        </p:spPr>
+        <p:txBody>
+          <a:bodyPr/>
+          <a:lstStyle/>
+          <a:p>
+            <a:r>
+              <a:t>Next week, Do: Fact-Checking the Machine</a:t>
+            </a:r>
+          </a:p>
+        </p:txBody>
+      </p:sp>
+      <p:sp>
+        <p:nvSpPr>
+          <p:cNvPr id="3" name="TextBox 2"/>
           <p:cNvSpPr txBox="1"/>
           <p:nvPr/>
         </p:nvSpPr>
         <p:spPr>
           <a:xfrm>
-            <a:off x="731520" y="1463040"/>
-            <a:ext cx="10728655" cy="2926080"/>
+            <a:off x="274320" y="1417320"/>
+            <a:ext cx="11643055" cy="4023360"/>
           </a:xfrm>
           <a:prstGeom prst="rect">
             <a:avLst/>
@@ -9072,13 +9685,27 @@
                 </a:solidFill>
                 <a:latin typeface="Arial Black"/>
               </a:rPr>
-              <a:t>Next week, Do: Fact-Checking the Machine</a:t>
-            </a:r>
-          </a:p>
-          <a:p>
-            <a:pPr algn="ctr"/>
-            <a:r>
-              <a:rPr sz="2800" b="0" i="0">
+              <a:t>Next week, Do:</a:t>
+            </a:r>
+            <a:br/>
+            <a:r>
+              <a:rPr sz="5400" b="0" i="0">
+                <a:solidFill>
+                  <a:srgbClr val="FFFFFF"/>
+                </a:solidFill>
+                <a:latin typeface="Arial Black"/>
+              </a:rPr>
+              <a:t>Fact-Checking the Machine</a:t>
+            </a:r>
+          </a:p>
+          <a:p>
+            <a:pPr algn="ctr">
+              <a:spcBef>
+                <a:spcPts val="1000"/>
+              </a:spcBef>
+            </a:pPr>
+            <a:r>
+              <a:rPr sz="2400" b="0" i="0">
                 <a:solidFill>
                   <a:srgbClr val="FFFFFF"/>
                 </a:solidFill>
@@ -9117,7 +9744,33 @@
       <p:grpSpPr/>
       <p:sp>
         <p:nvSpPr>
-          <p:cNvPr id="2" name="TextBox 1"/>
+          <p:cNvPr id="2" name="Title 1"/>
+          <p:cNvSpPr>
+            <a:spLocks noGrp="1"/>
+          </p:cNvSpPr>
+          <p:nvPr>
+            <p:ph type="title"/>
+          </p:nvPr>
+        </p:nvSpPr>
+        <p:spPr>
+          <a:xfrm>
+            <a:off x="-12191695" y="0"/>
+            <a:ext cx="12191695" cy="914400"/>
+          </a:xfrm>
+        </p:spPr>
+        <p:txBody>
+          <a:bodyPr/>
+          <a:lstStyle/>
+          <a:p>
+            <a:r>
+              <a:t>Four steps</a:t>
+            </a:r>
+          </a:p>
+        </p:txBody>
+      </p:sp>
+      <p:sp>
+        <p:nvSpPr>
+          <p:cNvPr id="3" name="TextBox 2"/>
           <p:cNvSpPr txBox="1"/>
           <p:nvPr/>
         </p:nvSpPr>
@@ -9151,7 +9804,7 @@
       </p:sp>
       <p:sp>
         <p:nvSpPr>
-          <p:cNvPr id="3" name="TextBox 2"/>
+          <p:cNvPr id="4" name="TextBox 3"/>
           <p:cNvSpPr txBox="1"/>
           <p:nvPr/>
         </p:nvSpPr>
@@ -9331,9 +9984,41 @@
         <p:nvPr/>
       </p:nvGrpSpPr>
       <p:grpSpPr/>
+      <p:sp>
+        <p:nvSpPr>
+          <p:cNvPr id="2" name="Title 1"/>
+          <p:cNvSpPr>
+            <a:spLocks noGrp="1"/>
+          </p:cNvSpPr>
+          <p:nvPr>
+            <p:ph type="title"/>
+          </p:nvPr>
+        </p:nvSpPr>
+        <p:spPr>
+          <a:xfrm>
+            <a:off x="-12191695" y="0"/>
+            <a:ext cx="12191695" cy="914400"/>
+          </a:xfrm>
+        </p:spPr>
+        <p:txBody>
+          <a:bodyPr/>
+          <a:lstStyle/>
+          <a:p>
+            <a:r>
+              <a:t>Prompt: steps 2 and 4</a:t>
+            </a:r>
+          </a:p>
+        </p:txBody>
+      </p:sp>
       <p:grpSp>
         <p:nvGrpSpPr>
-          <p:cNvPr id="2" name="Group 1"/>
+          <p:cNvPr id="3" name="Window prompt.exe">
+            <a:extLst>
+              <a:ext uri="{C183D7F6-B498-43B3-948B-1728B52AA6E4}">
+                <adec:decorative xmlns:adec="http://schemas.microsoft.com/office/drawing/2017/decorative" val="1"/>
+              </a:ext>
+            </a:extLst>
+          </p:cNvPr>
           <p:cNvGrpSpPr/>
           <p:nvPr/>
         </p:nvGrpSpPr>
@@ -9347,7 +10032,7 @@
         </p:grpSpPr>
         <p:sp>
           <p:nvSpPr>
-            <p:cNvPr id="3" name="Rectangle 2"/>
+            <p:cNvPr id="4" name="Rectangle 3"/>
             <p:cNvSpPr/>
             <p:nvPr/>
           </p:nvSpPr>
@@ -9391,7 +10076,7 @@
         </p:sp>
         <p:sp>
           <p:nvSpPr>
-            <p:cNvPr id="4" name="Rectangle 3"/>
+            <p:cNvPr id="5" name="Rectangle 4"/>
             <p:cNvSpPr/>
             <p:nvPr/>
           </p:nvSpPr>
@@ -9437,7 +10122,7 @@
         </p:sp>
         <p:sp>
           <p:nvSpPr>
-            <p:cNvPr id="5" name="Rectangle 4"/>
+            <p:cNvPr id="6" name="Rectangle 5"/>
             <p:cNvSpPr/>
             <p:nvPr/>
           </p:nvSpPr>
@@ -9483,7 +10168,7 @@
         </p:sp>
         <p:sp>
           <p:nvSpPr>
-            <p:cNvPr id="6" name="Rectangle 5"/>
+            <p:cNvPr id="7" name="Rectangle 6"/>
             <p:cNvSpPr/>
             <p:nvPr/>
           </p:nvSpPr>
@@ -9529,7 +10214,7 @@
         </p:sp>
         <p:sp>
           <p:nvSpPr>
-            <p:cNvPr id="7" name="Rectangle 6"/>
+            <p:cNvPr id="8" name="Rectangle 7"/>
             <p:cNvSpPr/>
             <p:nvPr/>
           </p:nvSpPr>
@@ -9575,7 +10260,7 @@
         </p:sp>
         <p:sp>
           <p:nvSpPr>
-            <p:cNvPr id="8" name="Rectangle 7"/>
+            <p:cNvPr id="9" name="Rectangle 8"/>
             <p:cNvSpPr/>
             <p:nvPr/>
           </p:nvSpPr>
@@ -9621,7 +10306,7 @@
         </p:sp>
         <p:sp>
           <p:nvSpPr>
-            <p:cNvPr id="9" name="TextBox 8"/>
+            <p:cNvPr id="10" name="TextBox 9"/>
             <p:cNvSpPr txBox="1"/>
             <p:nvPr/>
           </p:nvSpPr>
@@ -9656,7 +10341,7 @@
       </p:grpSp>
       <p:sp>
         <p:nvSpPr>
-          <p:cNvPr id="10" name="TextBox 9"/>
+          <p:cNvPr id="11" name="TextBox 10"/>
           <p:cNvSpPr txBox="1"/>
           <p:nvPr/>
         </p:nvSpPr>
@@ -9687,6 +10372,11 @@
             </a:r>
           </a:p>
           <a:p>
+            <a:pPr>
+              <a:spcBef>
+                <a:spcPts val="600"/>
+              </a:spcBef>
+            </a:pPr>
             <a:r>
               <a:rPr sz="2800" b="1" i="0">
                 <a:solidFill>
@@ -9694,7 +10384,7 @@
                 </a:solidFill>
                 <a:latin typeface="Courier New"/>
               </a:rPr>
-              <a:t>&gt;</a:t>
+              <a:t>&gt; </a:t>
             </a:r>
             <a:r>
               <a:rPr sz="2800" b="0" i="0">
@@ -9736,7 +10426,33 @@
       <p:grpSpPr/>
       <p:sp>
         <p:nvSpPr>
-          <p:cNvPr id="2" name="TextBox 1"/>
+          <p:cNvPr id="2" name="Title 1"/>
+          <p:cNvSpPr>
+            <a:spLocks noGrp="1"/>
+          </p:cNvSpPr>
+          <p:nvPr>
+            <p:ph type="title"/>
+          </p:nvPr>
+        </p:nvSpPr>
+        <p:spPr>
+          <a:xfrm>
+            <a:off x="-12191695" y="0"/>
+            <a:ext cx="12191695" cy="914400"/>
+          </a:xfrm>
+        </p:spPr>
+        <p:txBody>
+          <a:bodyPr/>
+          <a:lstStyle/>
+          <a:p>
+            <a:r>
+              <a:t>Sort every source</a:t>
+            </a:r>
+          </a:p>
+        </p:txBody>
+      </p:sp>
+      <p:sp>
+        <p:nvSpPr>
+          <p:cNvPr id="3" name="TextBox 2"/>
           <p:cNvSpPr txBox="1"/>
           <p:nvPr/>
         </p:nvSpPr>
@@ -9770,7 +10486,7 @@
       </p:sp>
       <p:sp>
         <p:nvSpPr>
-          <p:cNvPr id="3" name="TextBox 2"/>
+          <p:cNvPr id="4" name="TextBox 3"/>
           <p:cNvSpPr txBox="1"/>
           <p:nvPr/>
         </p:nvSpPr>
@@ -9895,9 +10611,41 @@
         <p:nvPr/>
       </p:nvGrpSpPr>
       <p:grpSpPr/>
+      <p:sp>
+        <p:nvSpPr>
+          <p:cNvPr id="2" name="Title 1"/>
+          <p:cNvSpPr>
+            <a:spLocks noGrp="1"/>
+          </p:cNvSpPr>
+          <p:nvPr>
+            <p:ph type="title"/>
+          </p:nvPr>
+        </p:nvSpPr>
+        <p:spPr>
+          <a:xfrm>
+            <a:off x="-12191695" y="0"/>
+            <a:ext cx="12191695" cy="914400"/>
+          </a:xfrm>
+        </p:spPr>
+        <p:txBody>
+          <a:bodyPr/>
+          <a:lstStyle/>
+          <a:p>
+            <a:r>
+              <a:t>Discussion question</a:t>
+            </a:r>
+          </a:p>
+        </p:txBody>
+      </p:sp>
       <p:grpSp>
         <p:nvGrpSpPr>
-          <p:cNvPr id="2" name="Group 1"/>
+          <p:cNvPr id="3" name="Window discuss.txt">
+            <a:extLst>
+              <a:ext uri="{C183D7F6-B498-43B3-948B-1728B52AA6E4}">
+                <adec:decorative xmlns:adec="http://schemas.microsoft.com/office/drawing/2017/decorative" val="1"/>
+              </a:ext>
+            </a:extLst>
+          </p:cNvPr>
           <p:cNvGrpSpPr/>
           <p:nvPr/>
         </p:nvGrpSpPr>
@@ -9911,7 +10659,7 @@
         </p:grpSpPr>
         <p:sp>
           <p:nvSpPr>
-            <p:cNvPr id="3" name="Rectangle 2"/>
+            <p:cNvPr id="4" name="Rectangle 3"/>
             <p:cNvSpPr/>
             <p:nvPr/>
           </p:nvSpPr>
@@ -9955,7 +10703,7 @@
         </p:sp>
         <p:sp>
           <p:nvSpPr>
-            <p:cNvPr id="4" name="Rectangle 3"/>
+            <p:cNvPr id="5" name="Rectangle 4"/>
             <p:cNvSpPr/>
             <p:nvPr/>
           </p:nvSpPr>
@@ -10001,7 +10749,7 @@
         </p:sp>
         <p:sp>
           <p:nvSpPr>
-            <p:cNvPr id="5" name="Rectangle 4"/>
+            <p:cNvPr id="6" name="Rectangle 5"/>
             <p:cNvSpPr/>
             <p:nvPr/>
           </p:nvSpPr>
@@ -10047,7 +10795,7 @@
         </p:sp>
         <p:sp>
           <p:nvSpPr>
-            <p:cNvPr id="6" name="Rectangle 5"/>
+            <p:cNvPr id="7" name="Rectangle 6"/>
             <p:cNvSpPr/>
             <p:nvPr/>
           </p:nvSpPr>
@@ -10093,7 +10841,7 @@
         </p:sp>
         <p:sp>
           <p:nvSpPr>
-            <p:cNvPr id="7" name="Rectangle 6"/>
+            <p:cNvPr id="8" name="Rectangle 7"/>
             <p:cNvSpPr/>
             <p:nvPr/>
           </p:nvSpPr>
@@ -10139,7 +10887,7 @@
         </p:sp>
         <p:sp>
           <p:nvSpPr>
-            <p:cNvPr id="8" name="Rectangle 7"/>
+            <p:cNvPr id="9" name="Rectangle 8"/>
             <p:cNvSpPr/>
             <p:nvPr/>
           </p:nvSpPr>
@@ -10185,7 +10933,7 @@
         </p:sp>
         <p:sp>
           <p:nvSpPr>
-            <p:cNvPr id="9" name="TextBox 8"/>
+            <p:cNvPr id="10" name="TextBox 9"/>
             <p:cNvSpPr txBox="1"/>
             <p:nvPr/>
           </p:nvSpPr>
@@ -10220,7 +10968,7 @@
       </p:grpSp>
       <p:sp>
         <p:nvSpPr>
-          <p:cNvPr id="10" name="TextBox 9"/>
+          <p:cNvPr id="11" name="TextBox 10"/>
           <p:cNvSpPr txBox="1"/>
           <p:nvPr/>
         </p:nvSpPr>
@@ -10251,6 +10999,11 @@
             </a:r>
           </a:p>
           <a:p>
+            <a:pPr>
+              <a:spcBef>
+                <a:spcPts val="1200"/>
+              </a:spcBef>
+            </a:pPr>
             <a:r>
               <a:rPr sz="2000" b="0" i="0">
                 <a:solidFill>
@@ -10289,9 +11042,41 @@
         <p:nvPr/>
       </p:nvGrpSpPr>
       <p:grpSpPr/>
+      <p:sp>
+        <p:nvSpPr>
+          <p:cNvPr id="2" name="Title 1"/>
+          <p:cNvSpPr>
+            <a:spLocks noGrp="1"/>
+          </p:cNvSpPr>
+          <p:nvPr>
+            <p:ph type="title"/>
+          </p:nvPr>
+        </p:nvSpPr>
+        <p:spPr>
+          <a:xfrm>
+            <a:off x="-12191695" y="0"/>
+            <a:ext cx="12191695" cy="914400"/>
+          </a:xfrm>
+        </p:spPr>
+        <p:txBody>
+          <a:bodyPr/>
+          <a:lstStyle/>
+          <a:p>
+            <a:r>
+              <a:t>Machine-generated poetry, 1984: generated text has a long history</a:t>
+            </a:r>
+          </a:p>
+        </p:txBody>
+      </p:sp>
       <p:grpSp>
         <p:nvGrpSpPr>
-          <p:cNvPr id="2" name="Group 1"/>
+          <p:cNvPr id="3" name="Window image.png">
+            <a:extLst>
+              <a:ext uri="{C183D7F6-B498-43B3-948B-1728B52AA6E4}">
+                <adec:decorative xmlns:adec="http://schemas.microsoft.com/office/drawing/2017/decorative" val="1"/>
+              </a:ext>
+            </a:extLst>
+          </p:cNvPr>
           <p:cNvGrpSpPr/>
           <p:nvPr/>
         </p:nvGrpSpPr>
@@ -10305,7 +11090,7 @@
         </p:grpSpPr>
         <p:sp>
           <p:nvSpPr>
-            <p:cNvPr id="3" name="Rectangle 2"/>
+            <p:cNvPr id="4" name="Rectangle 3"/>
             <p:cNvSpPr/>
             <p:nvPr/>
           </p:nvSpPr>
@@ -10349,7 +11134,7 @@
         </p:sp>
         <p:sp>
           <p:nvSpPr>
-            <p:cNvPr id="4" name="Rectangle 3"/>
+            <p:cNvPr id="5" name="Rectangle 4"/>
             <p:cNvSpPr/>
             <p:nvPr/>
           </p:nvSpPr>
@@ -10395,7 +11180,7 @@
         </p:sp>
         <p:sp>
           <p:nvSpPr>
-            <p:cNvPr id="5" name="Rectangle 4"/>
+            <p:cNvPr id="6" name="Rectangle 5"/>
             <p:cNvSpPr/>
             <p:nvPr/>
           </p:nvSpPr>
@@ -10441,7 +11226,7 @@
         </p:sp>
         <p:sp>
           <p:nvSpPr>
-            <p:cNvPr id="6" name="Rectangle 5"/>
+            <p:cNvPr id="7" name="Rectangle 6"/>
             <p:cNvSpPr/>
             <p:nvPr/>
           </p:nvSpPr>
@@ -10487,7 +11272,7 @@
         </p:sp>
         <p:sp>
           <p:nvSpPr>
-            <p:cNvPr id="7" name="Rectangle 6"/>
+            <p:cNvPr id="8" name="Rectangle 7"/>
             <p:cNvSpPr/>
             <p:nvPr/>
           </p:nvSpPr>
@@ -10533,7 +11318,7 @@
         </p:sp>
         <p:sp>
           <p:nvSpPr>
-            <p:cNvPr id="8" name="Rectangle 7"/>
+            <p:cNvPr id="9" name="Rectangle 8"/>
             <p:cNvSpPr/>
             <p:nvPr/>
           </p:nvSpPr>
@@ -10579,7 +11364,7 @@
         </p:sp>
         <p:sp>
           <p:nvSpPr>
-            <p:cNvPr id="9" name="TextBox 8"/>
+            <p:cNvPr id="10" name="TextBox 9"/>
             <p:cNvSpPr txBox="1"/>
             <p:nvPr/>
           </p:nvSpPr>
@@ -10614,7 +11399,7 @@
       </p:grpSp>
       <p:pic>
         <p:nvPicPr>
-          <p:cNvPr id="10" name="Picture 9" descr="Scanned page spread: a short poem beginning 'A hot and torrid bloom which / Fans wise flames and begs to be / Redeemed by forces black and strong' beside a black-and-white engraving of a desert landscape."/>
+          <p:cNvPr id="11" name="Picture 10" descr="Scanned page spread: a short poem beginning 'A hot and torrid bloom which / Fans wise flames and begs to be / Redeemed by forces black and strong' beside a black-and-white engraving of a desert landscape."/>
           <p:cNvPicPr>
             <a:picLocks noChangeAspect="1"/>
           </p:cNvPicPr>
@@ -10638,13 +11423,13 @@
       </p:pic>
       <p:sp>
         <p:nvSpPr>
-          <p:cNvPr id="11" name="TextBox 10"/>
+          <p:cNvPr id="12" name="TextBox 11"/>
           <p:cNvSpPr txBox="1"/>
           <p:nvPr/>
         </p:nvSpPr>
         <p:spPr>
           <a:xfrm>
-            <a:off x="822960" y="5989320"/>
+            <a:off x="822960" y="5943600"/>
             <a:ext cx="10545775" cy="731520"/>
           </a:xfrm>
           <a:prstGeom prst="rect">
@@ -10697,9 +11482,41 @@
         <p:nvPr/>
       </p:nvGrpSpPr>
       <p:grpSpPr/>
+      <p:sp>
+        <p:nvSpPr>
+          <p:cNvPr id="2" name="Title 1"/>
+          <p:cNvSpPr>
+            <a:spLocks noGrp="1"/>
+          </p:cNvSpPr>
+          <p:nvPr>
+            <p:ph type="title"/>
+          </p:nvPr>
+        </p:nvSpPr>
+        <p:spPr>
+          <a:xfrm>
+            <a:off x="-12191695" y="0"/>
+            <a:ext cx="12191695" cy="914400"/>
+          </a:xfrm>
+        </p:spPr>
+        <p:txBody>
+          <a:bodyPr/>
+          <a:lstStyle/>
+          <a:p>
+            <a:r>
+              <a:t>The blank box: where most people meet text generation today</a:t>
+            </a:r>
+          </a:p>
+        </p:txBody>
+      </p:sp>
       <p:grpSp>
         <p:nvGrpSpPr>
-          <p:cNvPr id="2" name="Group 1"/>
+          <p:cNvPr id="3" name="Window image.png">
+            <a:extLst>
+              <a:ext uri="{C183D7F6-B498-43B3-948B-1728B52AA6E4}">
+                <adec:decorative xmlns:adec="http://schemas.microsoft.com/office/drawing/2017/decorative" val="1"/>
+              </a:ext>
+            </a:extLst>
+          </p:cNvPr>
           <p:cNvGrpSpPr/>
           <p:nvPr/>
         </p:nvGrpSpPr>
@@ -10713,7 +11530,7 @@
         </p:grpSpPr>
         <p:sp>
           <p:nvSpPr>
-            <p:cNvPr id="3" name="Rectangle 2"/>
+            <p:cNvPr id="4" name="Rectangle 3"/>
             <p:cNvSpPr/>
             <p:nvPr/>
           </p:nvSpPr>
@@ -10757,7 +11574,7 @@
         </p:sp>
         <p:sp>
           <p:nvSpPr>
-            <p:cNvPr id="4" name="Rectangle 3"/>
+            <p:cNvPr id="5" name="Rectangle 4"/>
             <p:cNvSpPr/>
             <p:nvPr/>
           </p:nvSpPr>
@@ -10803,7 +11620,7 @@
         </p:sp>
         <p:sp>
           <p:nvSpPr>
-            <p:cNvPr id="5" name="Rectangle 4"/>
+            <p:cNvPr id="6" name="Rectangle 5"/>
             <p:cNvSpPr/>
             <p:nvPr/>
           </p:nvSpPr>
@@ -10849,7 +11666,7 @@
         </p:sp>
         <p:sp>
           <p:nvSpPr>
-            <p:cNvPr id="6" name="Rectangle 5"/>
+            <p:cNvPr id="7" name="Rectangle 6"/>
             <p:cNvSpPr/>
             <p:nvPr/>
           </p:nvSpPr>
@@ -10895,7 +11712,7 @@
         </p:sp>
         <p:sp>
           <p:nvSpPr>
-            <p:cNvPr id="7" name="Rectangle 6"/>
+            <p:cNvPr id="8" name="Rectangle 7"/>
             <p:cNvSpPr/>
             <p:nvPr/>
           </p:nvSpPr>
@@ -10941,7 +11758,7 @@
         </p:sp>
         <p:sp>
           <p:nvSpPr>
-            <p:cNvPr id="8" name="Rectangle 7"/>
+            <p:cNvPr id="9" name="Rectangle 8"/>
             <p:cNvSpPr/>
             <p:nvPr/>
           </p:nvSpPr>
@@ -10987,7 +11804,7 @@
         </p:sp>
         <p:sp>
           <p:nvSpPr>
-            <p:cNvPr id="9" name="TextBox 8"/>
+            <p:cNvPr id="10" name="TextBox 9"/>
             <p:cNvSpPr txBox="1"/>
             <p:nvPr/>
           </p:nvSpPr>
@@ -11022,7 +11839,7 @@
       </p:grpSp>
       <p:pic>
         <p:nvPicPr>
-          <p:cNvPr id="10" name="Picture 9" descr="ChatGPT start screen reading 'What can I help with?' above a message box and buttons for Create image, Help me write, Summarize text, and Make a plan."/>
+          <p:cNvPr id="11" name="Picture 10" descr="ChatGPT start screen reading 'What can I help with?' above a message box and buttons for Create image, Help me write, Summarize text, and Make a plan."/>
           <p:cNvPicPr>
             <a:picLocks noChangeAspect="1"/>
           </p:cNvPicPr>
@@ -11046,13 +11863,13 @@
       </p:pic>
       <p:sp>
         <p:nvSpPr>
-          <p:cNvPr id="11" name="TextBox 10"/>
+          <p:cNvPr id="12" name="TextBox 11"/>
           <p:cNvSpPr txBox="1"/>
           <p:nvPr/>
         </p:nvSpPr>
         <p:spPr>
           <a:xfrm>
-            <a:off x="822960" y="5989320"/>
+            <a:off x="822960" y="5943600"/>
             <a:ext cx="10545775" cy="731520"/>
           </a:xfrm>
           <a:prstGeom prst="rect">
@@ -11107,14 +11924,40 @@
       <p:grpSpPr/>
       <p:sp>
         <p:nvSpPr>
-          <p:cNvPr id="2" name="TextBox 1"/>
+          <p:cNvPr id="2" name="Title 1"/>
+          <p:cNvSpPr>
+            <a:spLocks noGrp="1"/>
+          </p:cNvSpPr>
+          <p:nvPr>
+            <p:ph type="title"/>
+          </p:nvPr>
+        </p:nvSpPr>
+        <p:spPr>
+          <a:xfrm>
+            <a:off x="-12191695" y="0"/>
+            <a:ext cx="12191695" cy="914400"/>
+          </a:xfrm>
+        </p:spPr>
+        <p:txBody>
+          <a:bodyPr/>
+          <a:lstStyle/>
+          <a:p>
+            <a:r>
+              <a:t>A blurry JPEG</a:t>
+            </a:r>
+          </a:p>
+        </p:txBody>
+      </p:sp>
+      <p:sp>
+        <p:nvSpPr>
+          <p:cNvPr id="3" name="TextBox 2"/>
           <p:cNvSpPr txBox="1"/>
           <p:nvPr/>
         </p:nvSpPr>
         <p:spPr>
           <a:xfrm>
-            <a:off x="731520" y="1463040"/>
-            <a:ext cx="10728655" cy="2926080"/>
+            <a:off x="274320" y="1417320"/>
+            <a:ext cx="11643055" cy="4023360"/>
           </a:xfrm>
           <a:prstGeom prst="rect">
             <a:avLst/>
@@ -11139,7 +11982,11 @@
             </a:r>
           </a:p>
           <a:p>
-            <a:pPr algn="ctr"/>
+            <a:pPr algn="ctr">
+              <a:spcBef>
+                <a:spcPts val="1000"/>
+              </a:spcBef>
+            </a:pPr>
             <a:r>
               <a:rPr sz="2800" b="0" i="0">
                 <a:solidFill>
@@ -11178,9 +12025,41 @@
         <p:nvPr/>
       </p:nvGrpSpPr>
       <p:grpSpPr/>
+      <p:sp>
+        <p:nvSpPr>
+          <p:cNvPr id="2" name="Title 1"/>
+          <p:cNvSpPr>
+            <a:spLocks noGrp="1"/>
+          </p:cNvSpPr>
+          <p:nvPr>
+            <p:ph type="title"/>
+          </p:nvPr>
+        </p:nvSpPr>
+        <p:spPr>
+          <a:xfrm>
+            <a:off x="-12191695" y="0"/>
+            <a:ext cx="12191695" cy="914400"/>
+          </a:xfrm>
+        </p:spPr>
+        <p:txBody>
+          <a:bodyPr/>
+          <a:lstStyle/>
+          <a:p>
+            <a:r>
+              <a:t>Quote: Ted Chiang, 2023</a:t>
+            </a:r>
+          </a:p>
+        </p:txBody>
+      </p:sp>
       <p:grpSp>
         <p:nvGrpSpPr>
-          <p:cNvPr id="2" name="Group 1"/>
+          <p:cNvPr id="3" name="Window quote.txt">
+            <a:extLst>
+              <a:ext uri="{C183D7F6-B498-43B3-948B-1728B52AA6E4}">
+                <adec:decorative xmlns:adec="http://schemas.microsoft.com/office/drawing/2017/decorative" val="1"/>
+              </a:ext>
+            </a:extLst>
+          </p:cNvPr>
           <p:cNvGrpSpPr/>
           <p:nvPr/>
         </p:nvGrpSpPr>
@@ -11194,7 +12073,7 @@
         </p:grpSpPr>
         <p:sp>
           <p:nvSpPr>
-            <p:cNvPr id="3" name="Rectangle 2"/>
+            <p:cNvPr id="4" name="Rectangle 3"/>
             <p:cNvSpPr/>
             <p:nvPr/>
           </p:nvSpPr>
@@ -11238,7 +12117,7 @@
         </p:sp>
         <p:sp>
           <p:nvSpPr>
-            <p:cNvPr id="4" name="Rectangle 3"/>
+            <p:cNvPr id="5" name="Rectangle 4"/>
             <p:cNvSpPr/>
             <p:nvPr/>
           </p:nvSpPr>
@@ -11284,7 +12163,7 @@
         </p:sp>
         <p:sp>
           <p:nvSpPr>
-            <p:cNvPr id="5" name="Rectangle 4"/>
+            <p:cNvPr id="6" name="Rectangle 5"/>
             <p:cNvSpPr/>
             <p:nvPr/>
           </p:nvSpPr>
@@ -11330,7 +12209,7 @@
         </p:sp>
         <p:sp>
           <p:nvSpPr>
-            <p:cNvPr id="6" name="Rectangle 5"/>
+            <p:cNvPr id="7" name="Rectangle 6"/>
             <p:cNvSpPr/>
             <p:nvPr/>
           </p:nvSpPr>
@@ -11376,7 +12255,7 @@
         </p:sp>
         <p:sp>
           <p:nvSpPr>
-            <p:cNvPr id="7" name="Rectangle 6"/>
+            <p:cNvPr id="8" name="Rectangle 7"/>
             <p:cNvSpPr/>
             <p:nvPr/>
           </p:nvSpPr>
@@ -11422,7 +12301,7 @@
         </p:sp>
         <p:sp>
           <p:nvSpPr>
-            <p:cNvPr id="8" name="Rectangle 7"/>
+            <p:cNvPr id="9" name="Rectangle 8"/>
             <p:cNvSpPr/>
             <p:nvPr/>
           </p:nvSpPr>
@@ -11468,7 +12347,7 @@
         </p:sp>
         <p:sp>
           <p:nvSpPr>
-            <p:cNvPr id="9" name="TextBox 8"/>
+            <p:cNvPr id="10" name="TextBox 9"/>
             <p:cNvSpPr txBox="1"/>
             <p:nvPr/>
           </p:nvSpPr>
@@ -11503,7 +12382,7 @@
       </p:grpSp>
       <p:sp>
         <p:nvSpPr>
-          <p:cNvPr id="10" name="TextBox 9"/>
+          <p:cNvPr id="11" name="TextBox 10"/>
           <p:cNvSpPr txBox="1"/>
           <p:nvPr/>
         </p:nvSpPr>
@@ -11524,7 +12403,7 @@
           <a:lstStyle/>
           <a:p>
             <a:r>
-              <a:rPr sz="2200" b="0" i="0">
+              <a:rPr sz="2800" b="0" i="0">
                 <a:solidFill>
                   <a:srgbClr val="1B1035"/>
                 </a:solidFill>
@@ -11537,7 +12416,7 @@
       </p:sp>
       <p:sp>
         <p:nvSpPr>
-          <p:cNvPr id="11" name="TextBox 10"/>
+          <p:cNvPr id="12" name="TextBox 11"/>
           <p:cNvSpPr txBox="1"/>
           <p:nvPr/>
         </p:nvSpPr>
@@ -11606,9 +12485,41 @@
         <p:nvPr/>
       </p:nvGrpSpPr>
       <p:grpSpPr/>
+      <p:sp>
+        <p:nvSpPr>
+          <p:cNvPr id="2" name="Title 1"/>
+          <p:cNvSpPr>
+            <a:spLocks noGrp="1"/>
+          </p:cNvSpPr>
+          <p:nvPr>
+            <p:ph type="title"/>
+          </p:nvPr>
+        </p:nvSpPr>
+        <p:spPr>
+          <a:xfrm>
+            <a:off x="-12191695" y="0"/>
+            <a:ext cx="12191695" cy="914400"/>
+          </a:xfrm>
+        </p:spPr>
+        <p:txBody>
+          <a:bodyPr/>
+          <a:lstStyle/>
+          <a:p>
+            <a:r>
+              <a:t>Quote: Ted Chiang, 2023</a:t>
+            </a:r>
+          </a:p>
+        </p:txBody>
+      </p:sp>
       <p:grpSp>
         <p:nvGrpSpPr>
-          <p:cNvPr id="2" name="Group 1"/>
+          <p:cNvPr id="3" name="Window quote.txt">
+            <a:extLst>
+              <a:ext uri="{C183D7F6-B498-43B3-948B-1728B52AA6E4}">
+                <adec:decorative xmlns:adec="http://schemas.microsoft.com/office/drawing/2017/decorative" val="1"/>
+              </a:ext>
+            </a:extLst>
+          </p:cNvPr>
           <p:cNvGrpSpPr/>
           <p:nvPr/>
         </p:nvGrpSpPr>
@@ -11622,7 +12533,7 @@
         </p:grpSpPr>
         <p:sp>
           <p:nvSpPr>
-            <p:cNvPr id="3" name="Rectangle 2"/>
+            <p:cNvPr id="4" name="Rectangle 3"/>
             <p:cNvSpPr/>
             <p:nvPr/>
           </p:nvSpPr>
@@ -11666,7 +12577,7 @@
         </p:sp>
         <p:sp>
           <p:nvSpPr>
-            <p:cNvPr id="4" name="Rectangle 3"/>
+            <p:cNvPr id="5" name="Rectangle 4"/>
             <p:cNvSpPr/>
             <p:nvPr/>
           </p:nvSpPr>
@@ -11712,7 +12623,7 @@
         </p:sp>
         <p:sp>
           <p:nvSpPr>
-            <p:cNvPr id="5" name="Rectangle 4"/>
+            <p:cNvPr id="6" name="Rectangle 5"/>
             <p:cNvSpPr/>
             <p:nvPr/>
           </p:nvSpPr>
@@ -11758,7 +12669,7 @@
         </p:sp>
         <p:sp>
           <p:nvSpPr>
-            <p:cNvPr id="6" name="Rectangle 5"/>
+            <p:cNvPr id="7" name="Rectangle 6"/>
             <p:cNvSpPr/>
             <p:nvPr/>
           </p:nvSpPr>
@@ -11804,7 +12715,7 @@
         </p:sp>
         <p:sp>
           <p:nvSpPr>
-            <p:cNvPr id="7" name="Rectangle 6"/>
+            <p:cNvPr id="8" name="Rectangle 7"/>
             <p:cNvSpPr/>
             <p:nvPr/>
           </p:nvSpPr>
@@ -11850,7 +12761,7 @@
         </p:sp>
         <p:sp>
           <p:nvSpPr>
-            <p:cNvPr id="8" name="Rectangle 7"/>
+            <p:cNvPr id="9" name="Rectangle 8"/>
             <p:cNvSpPr/>
             <p:nvPr/>
           </p:nvSpPr>
@@ -11896,7 +12807,7 @@
         </p:sp>
         <p:sp>
           <p:nvSpPr>
-            <p:cNvPr id="9" name="TextBox 8"/>
+            <p:cNvPr id="10" name="TextBox 9"/>
             <p:cNvSpPr txBox="1"/>
             <p:nvPr/>
           </p:nvSpPr>
@@ -11931,7 +12842,7 @@
       </p:grpSp>
       <p:sp>
         <p:nvSpPr>
-          <p:cNvPr id="10" name="TextBox 9"/>
+          <p:cNvPr id="11" name="TextBox 10"/>
           <p:cNvSpPr txBox="1"/>
           <p:nvPr/>
         </p:nvSpPr>
@@ -11965,7 +12876,7 @@
       </p:sp>
       <p:sp>
         <p:nvSpPr>
-          <p:cNvPr id="11" name="TextBox 10"/>
+          <p:cNvPr id="12" name="TextBox 11"/>
           <p:cNvSpPr txBox="1"/>
           <p:nvPr/>
         </p:nvSpPr>
@@ -12034,9 +12945,41 @@
         <p:nvPr/>
       </p:nvGrpSpPr>
       <p:grpSpPr/>
+      <p:sp>
+        <p:nvSpPr>
+          <p:cNvPr id="2" name="Title 1"/>
+          <p:cNvSpPr>
+            <a:spLocks noGrp="1"/>
+          </p:cNvSpPr>
+          <p:nvPr>
+            <p:ph type="title"/>
+          </p:nvPr>
+        </p:nvSpPr>
+        <p:spPr>
+          <a:xfrm>
+            <a:off x="-12191695" y="0"/>
+            <a:ext cx="12191695" cy="914400"/>
+          </a:xfrm>
+        </p:spPr>
+        <p:txBody>
+          <a:bodyPr/>
+          <a:lstStyle/>
+          <a:p>
+            <a:r>
+              <a:t>Quote: Ted Chiang, 2023</a:t>
+            </a:r>
+          </a:p>
+        </p:txBody>
+      </p:sp>
       <p:grpSp>
         <p:nvGrpSpPr>
-          <p:cNvPr id="2" name="Group 1"/>
+          <p:cNvPr id="3" name="Window quote.txt">
+            <a:extLst>
+              <a:ext uri="{C183D7F6-B498-43B3-948B-1728B52AA6E4}">
+                <adec:decorative xmlns:adec="http://schemas.microsoft.com/office/drawing/2017/decorative" val="1"/>
+              </a:ext>
+            </a:extLst>
+          </p:cNvPr>
           <p:cNvGrpSpPr/>
           <p:nvPr/>
         </p:nvGrpSpPr>
@@ -12050,7 +12993,7 @@
         </p:grpSpPr>
         <p:sp>
           <p:nvSpPr>
-            <p:cNvPr id="3" name="Rectangle 2"/>
+            <p:cNvPr id="4" name="Rectangle 3"/>
             <p:cNvSpPr/>
             <p:nvPr/>
           </p:nvSpPr>
@@ -12094,7 +13037,7 @@
         </p:sp>
         <p:sp>
           <p:nvSpPr>
-            <p:cNvPr id="4" name="Rectangle 3"/>
+            <p:cNvPr id="5" name="Rectangle 4"/>
             <p:cNvSpPr/>
             <p:nvPr/>
           </p:nvSpPr>
@@ -12140,7 +13083,7 @@
         </p:sp>
         <p:sp>
           <p:nvSpPr>
-            <p:cNvPr id="5" name="Rectangle 4"/>
+            <p:cNvPr id="6" name="Rectangle 5"/>
             <p:cNvSpPr/>
             <p:nvPr/>
           </p:nvSpPr>
@@ -12186,7 +13129,7 @@
         </p:sp>
         <p:sp>
           <p:nvSpPr>
-            <p:cNvPr id="6" name="Rectangle 5"/>
+            <p:cNvPr id="7" name="Rectangle 6"/>
             <p:cNvSpPr/>
             <p:nvPr/>
           </p:nvSpPr>
@@ -12232,7 +13175,7 @@
         </p:sp>
         <p:sp>
           <p:nvSpPr>
-            <p:cNvPr id="7" name="Rectangle 6"/>
+            <p:cNvPr id="8" name="Rectangle 7"/>
             <p:cNvSpPr/>
             <p:nvPr/>
           </p:nvSpPr>
@@ -12278,7 +13221,7 @@
         </p:sp>
         <p:sp>
           <p:nvSpPr>
-            <p:cNvPr id="8" name="Rectangle 7"/>
+            <p:cNvPr id="9" name="Rectangle 8"/>
             <p:cNvSpPr/>
             <p:nvPr/>
           </p:nvSpPr>
@@ -12324,7 +13267,7 @@
         </p:sp>
         <p:sp>
           <p:nvSpPr>
-            <p:cNvPr id="9" name="TextBox 8"/>
+            <p:cNvPr id="10" name="TextBox 9"/>
             <p:cNvSpPr txBox="1"/>
             <p:nvPr/>
           </p:nvSpPr>
@@ -12359,7 +13302,7 @@
       </p:grpSp>
       <p:sp>
         <p:nvSpPr>
-          <p:cNvPr id="10" name="TextBox 9"/>
+          <p:cNvPr id="11" name="TextBox 10"/>
           <p:cNvSpPr txBox="1"/>
           <p:nvPr/>
         </p:nvSpPr>
@@ -12380,7 +13323,7 @@
           <a:lstStyle/>
           <a:p>
             <a:r>
-              <a:rPr sz="2200" b="0" i="0">
+              <a:rPr sz="2800" b="0" i="0">
                 <a:solidFill>
                   <a:srgbClr val="1B1035"/>
                 </a:solidFill>
@@ -12393,7 +13336,7 @@
       </p:sp>
       <p:sp>
         <p:nvSpPr>
-          <p:cNvPr id="11" name="TextBox 10"/>
+          <p:cNvPr id="12" name="TextBox 11"/>
           <p:cNvSpPr txBox="1"/>
           <p:nvPr/>
         </p:nvSpPr>
@@ -12462,9 +13405,41 @@
         <p:nvPr/>
       </p:nvGrpSpPr>
       <p:grpSpPr/>
+      <p:sp>
+        <p:nvSpPr>
+          <p:cNvPr id="2" name="Title 1"/>
+          <p:cNvSpPr>
+            <a:spLocks noGrp="1"/>
+          </p:cNvSpPr>
+          <p:nvPr>
+            <p:ph type="title"/>
+          </p:nvPr>
+        </p:nvSpPr>
+        <p:spPr>
+          <a:xfrm>
+            <a:off x="-12191695" y="0"/>
+            <a:ext cx="12191695" cy="914400"/>
+          </a:xfrm>
+        </p:spPr>
+        <p:txBody>
+          <a:bodyPr/>
+          <a:lstStyle/>
+          <a:p>
+            <a:r>
+              <a:t>Quote: Ted Chiang, 2023</a:t>
+            </a:r>
+          </a:p>
+        </p:txBody>
+      </p:sp>
       <p:grpSp>
         <p:nvGrpSpPr>
-          <p:cNvPr id="2" name="Group 1"/>
+          <p:cNvPr id="3" name="Window quote.txt">
+            <a:extLst>
+              <a:ext uri="{C183D7F6-B498-43B3-948B-1728B52AA6E4}">
+                <adec:decorative xmlns:adec="http://schemas.microsoft.com/office/drawing/2017/decorative" val="1"/>
+              </a:ext>
+            </a:extLst>
+          </p:cNvPr>
           <p:cNvGrpSpPr/>
           <p:nvPr/>
         </p:nvGrpSpPr>
@@ -12478,7 +13453,7 @@
         </p:grpSpPr>
         <p:sp>
           <p:nvSpPr>
-            <p:cNvPr id="3" name="Rectangle 2"/>
+            <p:cNvPr id="4" name="Rectangle 3"/>
             <p:cNvSpPr/>
             <p:nvPr/>
           </p:nvSpPr>
@@ -12522,7 +13497,7 @@
         </p:sp>
         <p:sp>
           <p:nvSpPr>
-            <p:cNvPr id="4" name="Rectangle 3"/>
+            <p:cNvPr id="5" name="Rectangle 4"/>
             <p:cNvSpPr/>
             <p:nvPr/>
           </p:nvSpPr>
@@ -12568,7 +13543,7 @@
         </p:sp>
         <p:sp>
           <p:nvSpPr>
-            <p:cNvPr id="5" name="Rectangle 4"/>
+            <p:cNvPr id="6" name="Rectangle 5"/>
             <p:cNvSpPr/>
             <p:nvPr/>
           </p:nvSpPr>
@@ -12614,7 +13589,7 @@
         </p:sp>
         <p:sp>
           <p:nvSpPr>
-            <p:cNvPr id="6" name="Rectangle 5"/>
+            <p:cNvPr id="7" name="Rectangle 6"/>
             <p:cNvSpPr/>
             <p:nvPr/>
           </p:nvSpPr>
@@ -12660,7 +13635,7 @@
         </p:sp>
         <p:sp>
           <p:nvSpPr>
-            <p:cNvPr id="7" name="Rectangle 6"/>
+            <p:cNvPr id="8" name="Rectangle 7"/>
             <p:cNvSpPr/>
             <p:nvPr/>
           </p:nvSpPr>
@@ -12706,7 +13681,7 @@
         </p:sp>
         <p:sp>
           <p:nvSpPr>
-            <p:cNvPr id="8" name="Rectangle 7"/>
+            <p:cNvPr id="9" name="Rectangle 8"/>
             <p:cNvSpPr/>
             <p:nvPr/>
           </p:nvSpPr>
@@ -12752,7 +13727,7 @@
         </p:sp>
         <p:sp>
           <p:nvSpPr>
-            <p:cNvPr id="9" name="TextBox 8"/>
+            <p:cNvPr id="10" name="TextBox 9"/>
             <p:cNvSpPr txBox="1"/>
             <p:nvPr/>
           </p:nvSpPr>
@@ -12787,7 +13762,7 @@
       </p:grpSp>
       <p:sp>
         <p:nvSpPr>
-          <p:cNvPr id="10" name="TextBox 9"/>
+          <p:cNvPr id="11" name="TextBox 10"/>
           <p:cNvSpPr txBox="1"/>
           <p:nvPr/>
         </p:nvSpPr>
@@ -12808,7 +13783,7 @@
           <a:lstStyle/>
           <a:p>
             <a:r>
-              <a:rPr sz="2200" b="0" i="0">
+              <a:rPr sz="2800" b="0" i="0">
                 <a:solidFill>
                   <a:srgbClr val="1B1035"/>
                 </a:solidFill>
@@ -12821,7 +13796,7 @@
       </p:sp>
       <p:sp>
         <p:nvSpPr>
-          <p:cNvPr id="11" name="TextBox 10"/>
+          <p:cNvPr id="12" name="TextBox 11"/>
           <p:cNvSpPr txBox="1"/>
           <p:nvPr/>
         </p:nvSpPr>
